--- a/media/module7/slides.pptx
+++ b/media/module7/slides.pptx
@@ -22,6 +22,18 @@
     <p:sldId id="270" r:id="rId22"/>
     <p:sldId id="271" r:id="rId23"/>
     <p:sldId id="272" r:id="rId24"/>
+    <p:sldId id="273" r:id="rId25"/>
+    <p:sldId id="274" r:id="rId26"/>
+    <p:sldId id="275" r:id="rId27"/>
+    <p:sldId id="276" r:id="rId28"/>
+    <p:sldId id="277" r:id="rId29"/>
+    <p:sldId id="278" r:id="rId30"/>
+    <p:sldId id="279" r:id="rId31"/>
+    <p:sldId id="280" r:id="rId32"/>
+    <p:sldId id="281" r:id="rId33"/>
+    <p:sldId id="282" r:id="rId34"/>
+    <p:sldId id="283" r:id="rId35"/>
+    <p:sldId id="284" r:id="rId36"/>
   </p:sldIdLst>
   <p:sldSz cx="12191695" cy="6858000" type="screen4x3"/>
   <p:notesSz cx="6858000" cy="9144000"/>
@@ -518,7 +530,217 @@
           <a:lstStyle/>
           <a:p>
             <a:r>
-              <a:t>From MODULE7 Topics Covered.</a:t>
+              <a:t>From docs/MODULE7.md — read guides before running demos.</a:t>
+            </a:r>
+          </a:p>
+        </p:txBody>
+      </p:sp>
+      <p:sp>
+        <p:nvSpPr>
+          <p:cNvPr id="4" name="Slide Number Placeholder 3"/>
+          <p:cNvSpPr>
+            <a:spLocks noGrp="1"/>
+          </p:cNvSpPr>
+          <p:nvPr>
+            <p:ph type="sldNum" idx="5" sz="quarter"/>
+          </p:nvPr>
+        </p:nvSpPr>
+        <p:spPr/>
+      </p:sp>
+    </p:spTree>
+  </p:cSld>
+  <p:clrMapOvr>
+    <a:masterClrMapping/>
+  </p:clrMapOvr>
+</p:notes>
+</file>
+
+<file path=ppt/notesSlides/notesSlide10.xml><?xml version="1.0" encoding="utf-8"?>
+<p:notes xmlns:a="http://schemas.openxmlformats.org/drawingml/2006/main" xmlns:p="http://schemas.openxmlformats.org/presentationml/2006/main" xmlns:r="http://schemas.openxmlformats.org/officeDocument/2006/relationships">
+  <p:cSld>
+    <p:spTree>
+      <p:nvGrpSpPr>
+        <p:cNvPr id="1" name=""/>
+        <p:cNvGrpSpPr/>
+        <p:nvPr/>
+      </p:nvGrpSpPr>
+      <p:grpSpPr>
+        <a:xfrm>
+          <a:off x="0" y="0"/>
+          <a:ext cx="0" cy="0"/>
+          <a:chOff x="0" y="0"/>
+          <a:chExt cx="0" cy="0"/>
+        </a:xfrm>
+      </p:grpSpPr>
+      <p:sp>
+        <p:nvSpPr>
+          <p:cNvPr id="2" name="Slide Image Placeholder 1"/>
+          <p:cNvSpPr>
+            <a:spLocks noGrp="1"/>
+          </p:cNvSpPr>
+          <p:nvPr>
+            <p:ph type="sldImg" idx="2"/>
+          </p:nvPr>
+        </p:nvSpPr>
+        <p:spPr/>
+      </p:sp>
+      <p:sp>
+        <p:nvSpPr>
+          <p:cNvPr id="3" name="Notes Placeholder 2"/>
+          <p:cNvSpPr>
+            <a:spLocks noGrp="1"/>
+          </p:cNvSpPr>
+          <p:nvPr>
+            <p:ph type="body" idx="3" sz="quarter"/>
+          </p:nvPr>
+        </p:nvSpPr>
+        <p:spPr/>
+        <p:txBody>
+          <a:bodyPr/>
+          <a:lstStyle/>
+          <a:p>
+            <a:r>
+              <a:t>Run from course repository root.</a:t>
+            </a:r>
+          </a:p>
+        </p:txBody>
+      </p:sp>
+      <p:sp>
+        <p:nvSpPr>
+          <p:cNvPr id="4" name="Slide Number Placeholder 3"/>
+          <p:cNvSpPr>
+            <a:spLocks noGrp="1"/>
+          </p:cNvSpPr>
+          <p:nvPr>
+            <p:ph type="sldNum" idx="5" sz="quarter"/>
+          </p:nvPr>
+        </p:nvSpPr>
+        <p:spPr/>
+      </p:sp>
+    </p:spTree>
+  </p:cSld>
+  <p:clrMapOvr>
+    <a:masterClrMapping/>
+  </p:clrMapOvr>
+</p:notes>
+</file>
+
+<file path=ppt/notesSlides/notesSlide11.xml><?xml version="1.0" encoding="utf-8"?>
+<p:notes xmlns:a="http://schemas.openxmlformats.org/drawingml/2006/main" xmlns:p="http://schemas.openxmlformats.org/presentationml/2006/main" xmlns:r="http://schemas.openxmlformats.org/officeDocument/2006/relationships">
+  <p:cSld>
+    <p:spTree>
+      <p:nvGrpSpPr>
+        <p:cNvPr id="1" name=""/>
+        <p:cNvGrpSpPr/>
+        <p:nvPr/>
+      </p:nvGrpSpPr>
+      <p:grpSpPr>
+        <a:xfrm>
+          <a:off x="0" y="0"/>
+          <a:ext cx="0" cy="0"/>
+          <a:chOff x="0" y="0"/>
+          <a:chExt cx="0" cy="0"/>
+        </a:xfrm>
+      </p:grpSpPr>
+      <p:sp>
+        <p:nvSpPr>
+          <p:cNvPr id="2" name="Slide Image Placeholder 1"/>
+          <p:cNvSpPr>
+            <a:spLocks noGrp="1"/>
+          </p:cNvSpPr>
+          <p:nvPr>
+            <p:ph type="sldImg" idx="2"/>
+          </p:nvPr>
+        </p:nvSpPr>
+        <p:spPr/>
+      </p:sp>
+      <p:sp>
+        <p:nvSpPr>
+          <p:cNvPr id="3" name="Notes Placeholder 2"/>
+          <p:cNvSpPr>
+            <a:spLocks noGrp="1"/>
+          </p:cNvSpPr>
+          <p:nvPr>
+            <p:ph type="body" idx="3" sz="quarter"/>
+          </p:nvPr>
+        </p:nvSpPr>
+        <p:spPr/>
+        <p:txBody>
+          <a:bodyPr/>
+          <a:lstStyle/>
+          <a:p>
+            <a:r>
+              <a:t>module7/examples/examples/i2c_baseline/README.md</a:t>
+            </a:r>
+          </a:p>
+        </p:txBody>
+      </p:sp>
+      <p:sp>
+        <p:nvSpPr>
+          <p:cNvPr id="4" name="Slide Number Placeholder 3"/>
+          <p:cNvSpPr>
+            <a:spLocks noGrp="1"/>
+          </p:cNvSpPr>
+          <p:nvPr>
+            <p:ph type="sldNum" idx="5" sz="quarter"/>
+          </p:nvPr>
+        </p:nvSpPr>
+        <p:spPr/>
+      </p:sp>
+    </p:spTree>
+  </p:cSld>
+  <p:clrMapOvr>
+    <a:masterClrMapping/>
+  </p:clrMapOvr>
+</p:notes>
+</file>
+
+<file path=ppt/notesSlides/notesSlide12.xml><?xml version="1.0" encoding="utf-8"?>
+<p:notes xmlns:a="http://schemas.openxmlformats.org/drawingml/2006/main" xmlns:p="http://schemas.openxmlformats.org/presentationml/2006/main" xmlns:r="http://schemas.openxmlformats.org/officeDocument/2006/relationships">
+  <p:cSld>
+    <p:spTree>
+      <p:nvGrpSpPr>
+        <p:cNvPr id="1" name=""/>
+        <p:cNvGrpSpPr/>
+        <p:nvPr/>
+      </p:nvGrpSpPr>
+      <p:grpSpPr>
+        <a:xfrm>
+          <a:off x="0" y="0"/>
+          <a:ext cx="0" cy="0"/>
+          <a:chOff x="0" y="0"/>
+          <a:chExt cx="0" cy="0"/>
+        </a:xfrm>
+      </p:grpSpPr>
+      <p:sp>
+        <p:nvSpPr>
+          <p:cNvPr id="2" name="Slide Image Placeholder 1"/>
+          <p:cNvSpPr>
+            <a:spLocks noGrp="1"/>
+          </p:cNvSpPr>
+          <p:nvPr>
+            <p:ph type="sldImg" idx="2"/>
+          </p:nvPr>
+        </p:nvSpPr>
+        <p:spPr/>
+      </p:sp>
+      <p:sp>
+        <p:nvSpPr>
+          <p:cNvPr id="3" name="Notes Placeholder 2"/>
+          <p:cNvSpPr>
+            <a:spLocks noGrp="1"/>
+          </p:cNvSpPr>
+          <p:nvPr>
+            <p:ph type="body" idx="3" sz="quarter"/>
+          </p:nvPr>
+        </p:nvSpPr>
+        <p:spPr/>
+        <p:txBody>
+          <a:bodyPr/>
+          <a:lstStyle/>
+          <a:p>
+            <a:r>
+              <a:t>Hands-on: module7/examples/examples/i2c_baseline/</a:t>
             </a:r>
           </a:p>
         </p:txBody>
@@ -588,7 +810,7 @@
           <a:lstStyle/>
           <a:p>
             <a:r>
-              <a:t>From MODULE7 Topics Covered.</a:t>
+              <a:t>From MODULE7 Design Architecture.</a:t>
             </a:r>
           </a:p>
         </p:txBody>
@@ -658,7 +880,7 @@
           <a:lstStyle/>
           <a:p>
             <a:r>
-              <a:t>From MODULE7 Topics Covered.</a:t>
+              <a:t>From MODULE7 Design Architecture.</a:t>
             </a:r>
           </a:p>
         </p:txBody>
@@ -728,7 +950,7 @@
           <a:lstStyle/>
           <a:p>
             <a:r>
-              <a:t>Run from course repository root.</a:t>
+              <a:t>From MODULE7 Design Architecture.</a:t>
             </a:r>
           </a:p>
         </p:txBody>
@@ -798,7 +1020,7 @@
           <a:lstStyle/>
           <a:p>
             <a:r>
-              <a:t>module7/examples/i2c_baseline/README.md</a:t>
+              <a:t>From MODULE7 Verification &amp; Testing Methods.</a:t>
             </a:r>
           </a:p>
         </p:txBody>
@@ -868,7 +1090,217 @@
           <a:lstStyle/>
           <a:p>
             <a:r>
-              <a:t>Hands-on: module7/examples/i2c_baseline/</a:t>
+              <a:t>From MODULE7 Verification &amp; Testing Methods.</a:t>
+            </a:r>
+          </a:p>
+        </p:txBody>
+      </p:sp>
+      <p:sp>
+        <p:nvSpPr>
+          <p:cNvPr id="4" name="Slide Number Placeholder 3"/>
+          <p:cNvSpPr>
+            <a:spLocks noGrp="1"/>
+          </p:cNvSpPr>
+          <p:nvPr>
+            <p:ph type="sldNum" idx="5" sz="quarter"/>
+          </p:nvPr>
+        </p:nvSpPr>
+        <p:spPr/>
+      </p:sp>
+    </p:spTree>
+  </p:cSld>
+  <p:clrMapOvr>
+    <a:masterClrMapping/>
+  </p:clrMapOvr>
+</p:notes>
+</file>
+
+<file path=ppt/notesSlides/notesSlide7.xml><?xml version="1.0" encoding="utf-8"?>
+<p:notes xmlns:a="http://schemas.openxmlformats.org/drawingml/2006/main" xmlns:p="http://schemas.openxmlformats.org/presentationml/2006/main" xmlns:r="http://schemas.openxmlformats.org/officeDocument/2006/relationships">
+  <p:cSld>
+    <p:spTree>
+      <p:nvGrpSpPr>
+        <p:cNvPr id="1" name=""/>
+        <p:cNvGrpSpPr/>
+        <p:nvPr/>
+      </p:nvGrpSpPr>
+      <p:grpSpPr>
+        <a:xfrm>
+          <a:off x="0" y="0"/>
+          <a:ext cx="0" cy="0"/>
+          <a:chOff x="0" y="0"/>
+          <a:chExt cx="0" cy="0"/>
+        </a:xfrm>
+      </p:grpSpPr>
+      <p:sp>
+        <p:nvSpPr>
+          <p:cNvPr id="2" name="Slide Image Placeholder 1"/>
+          <p:cNvSpPr>
+            <a:spLocks noGrp="1"/>
+          </p:cNvSpPr>
+          <p:nvPr>
+            <p:ph type="sldImg" idx="2"/>
+          </p:nvPr>
+        </p:nvSpPr>
+        <p:spPr/>
+      </p:sp>
+      <p:sp>
+        <p:nvSpPr>
+          <p:cNvPr id="3" name="Notes Placeholder 2"/>
+          <p:cNvSpPr>
+            <a:spLocks noGrp="1"/>
+          </p:cNvSpPr>
+          <p:nvPr>
+            <p:ph type="body" idx="3" sz="quarter"/>
+          </p:nvPr>
+        </p:nvSpPr>
+        <p:spPr/>
+        <p:txBody>
+          <a:bodyPr/>
+          <a:lstStyle/>
+          <a:p>
+            <a:r>
+              <a:t>From MODULE7 Verification &amp; Testing Methods.</a:t>
+            </a:r>
+          </a:p>
+        </p:txBody>
+      </p:sp>
+      <p:sp>
+        <p:nvSpPr>
+          <p:cNvPr id="4" name="Slide Number Placeholder 3"/>
+          <p:cNvSpPr>
+            <a:spLocks noGrp="1"/>
+          </p:cNvSpPr>
+          <p:nvPr>
+            <p:ph type="sldNum" idx="5" sz="quarter"/>
+          </p:nvPr>
+        </p:nvSpPr>
+        <p:spPr/>
+      </p:sp>
+    </p:spTree>
+  </p:cSld>
+  <p:clrMapOvr>
+    <a:masterClrMapping/>
+  </p:clrMapOvr>
+</p:notes>
+</file>
+
+<file path=ppt/notesSlides/notesSlide8.xml><?xml version="1.0" encoding="utf-8"?>
+<p:notes xmlns:a="http://schemas.openxmlformats.org/drawingml/2006/main" xmlns:p="http://schemas.openxmlformats.org/presentationml/2006/main" xmlns:r="http://schemas.openxmlformats.org/officeDocument/2006/relationships">
+  <p:cSld>
+    <p:spTree>
+      <p:nvGrpSpPr>
+        <p:cNvPr id="1" name=""/>
+        <p:cNvGrpSpPr/>
+        <p:nvPr/>
+      </p:nvGrpSpPr>
+      <p:grpSpPr>
+        <a:xfrm>
+          <a:off x="0" y="0"/>
+          <a:ext cx="0" cy="0"/>
+          <a:chOff x="0" y="0"/>
+          <a:chExt cx="0" cy="0"/>
+        </a:xfrm>
+      </p:grpSpPr>
+      <p:sp>
+        <p:nvSpPr>
+          <p:cNvPr id="2" name="Slide Image Placeholder 1"/>
+          <p:cNvSpPr>
+            <a:spLocks noGrp="1"/>
+          </p:cNvSpPr>
+          <p:nvPr>
+            <p:ph type="sldImg" idx="2"/>
+          </p:nvPr>
+        </p:nvSpPr>
+        <p:spPr/>
+      </p:sp>
+      <p:sp>
+        <p:nvSpPr>
+          <p:cNvPr id="3" name="Notes Placeholder 2"/>
+          <p:cNvSpPr>
+            <a:spLocks noGrp="1"/>
+          </p:cNvSpPr>
+          <p:nvPr>
+            <p:ph type="body" idx="3" sz="quarter"/>
+          </p:nvPr>
+        </p:nvSpPr>
+        <p:spPr/>
+        <p:txBody>
+          <a:bodyPr/>
+          <a:lstStyle/>
+          <a:p>
+            <a:r>
+              <a:t>From MODULE7 Topics Covered.</a:t>
+            </a:r>
+          </a:p>
+        </p:txBody>
+      </p:sp>
+      <p:sp>
+        <p:nvSpPr>
+          <p:cNvPr id="4" name="Slide Number Placeholder 3"/>
+          <p:cNvSpPr>
+            <a:spLocks noGrp="1"/>
+          </p:cNvSpPr>
+          <p:nvPr>
+            <p:ph type="sldNum" idx="5" sz="quarter"/>
+          </p:nvPr>
+        </p:nvSpPr>
+        <p:spPr/>
+      </p:sp>
+    </p:spTree>
+  </p:cSld>
+  <p:clrMapOvr>
+    <a:masterClrMapping/>
+  </p:clrMapOvr>
+</p:notes>
+</file>
+
+<file path=ppt/notesSlides/notesSlide9.xml><?xml version="1.0" encoding="utf-8"?>
+<p:notes xmlns:a="http://schemas.openxmlformats.org/drawingml/2006/main" xmlns:p="http://schemas.openxmlformats.org/presentationml/2006/main" xmlns:r="http://schemas.openxmlformats.org/officeDocument/2006/relationships">
+  <p:cSld>
+    <p:spTree>
+      <p:nvGrpSpPr>
+        <p:cNvPr id="1" name=""/>
+        <p:cNvGrpSpPr/>
+        <p:nvPr/>
+      </p:nvGrpSpPr>
+      <p:grpSpPr>
+        <a:xfrm>
+          <a:off x="0" y="0"/>
+          <a:ext cx="0" cy="0"/>
+          <a:chOff x="0" y="0"/>
+          <a:chExt cx="0" cy="0"/>
+        </a:xfrm>
+      </p:grpSpPr>
+      <p:sp>
+        <p:nvSpPr>
+          <p:cNvPr id="2" name="Slide Image Placeholder 1"/>
+          <p:cNvSpPr>
+            <a:spLocks noGrp="1"/>
+          </p:cNvSpPr>
+          <p:nvPr>
+            <p:ph type="sldImg" idx="2"/>
+          </p:nvPr>
+        </p:nvSpPr>
+        <p:spPr/>
+      </p:sp>
+      <p:sp>
+        <p:nvSpPr>
+          <p:cNvPr id="3" name="Notes Placeholder 2"/>
+          <p:cNvSpPr>
+            <a:spLocks noGrp="1"/>
+          </p:cNvSpPr>
+          <p:nvPr>
+            <p:ph type="body" idx="3" sz="quarter"/>
+          </p:nvPr>
+        </p:nvSpPr>
+        <p:spPr/>
+        <p:txBody>
+          <a:bodyPr/>
+          <a:lstStyle/>
+          <a:p>
+            <a:r>
+              <a:t>From MODULE7 Topics Covered.</a:t>
             </a:r>
           </a:p>
         </p:txBody>
@@ -4000,8 +4432,8 @@
         </p:nvSpPr>
         <p:spPr>
           <a:xfrm>
-            <a:off x="548640" y="2743200"/>
-            <a:ext cx="11064240" cy="1371600"/>
+            <a:off x="548640" y="411480"/>
+            <a:ext cx="11064240" cy="777240"/>
           </a:xfrm>
           <a:prstGeom prst="rect">
             <a:avLst/>
@@ -4014,11 +4446,11 @@
           </a:bodyPr>
           <a:lstStyle/>
           <a:p>
-            <a:pPr algn="ctr">
-              <a:lnSpc>
-                <a:spcPts val="2200"/>
-              </a:lnSpc>
-              <a:defRPr sz="3600" b="1">
+            <a:pPr>
+              <a:lnSpc>
+                <a:spcPts val="2200"/>
+              </a:lnSpc>
+              <a:defRPr sz="2800" b="1">
                 <a:solidFill>
                   <a:srgbClr val="1A1A2E"/>
                 </a:solidFill>
@@ -4026,14 +4458,77 @@
               </a:defRPr>
             </a:pPr>
             <a:r>
-              <a:t>Hands-on examples</a:t>
-            </a:r>
-          </a:p>
-        </p:txBody>
-      </p:sp>
-      <p:sp>
-        <p:nvSpPr>
-          <p:cNvPr id="3" name="TextBox 2"/>
+              <a:t>Verification environment architecture</a:t>
+            </a:r>
+          </a:p>
+        </p:txBody>
+      </p:sp>
+      <p:pic>
+        <p:nvPicPr>
+          <p:cNvPr id="3" name="Picture 2" descr="verification_architecture.png"/>
+          <p:cNvPicPr>
+            <a:picLocks noChangeAspect="1"/>
+          </p:cNvPicPr>
+          <p:nvPr/>
+        </p:nvPicPr>
+        <p:blipFill>
+          <a:blip r:embed="rId2"/>
+          <a:stretch>
+            <a:fillRect/>
+          </a:stretch>
+        </p:blipFill>
+        <p:spPr>
+          <a:xfrm>
+            <a:off x="548640" y="1143000"/>
+            <a:ext cx="8128000" cy="4572000"/>
+          </a:xfrm>
+          <a:prstGeom prst="rect">
+            <a:avLst/>
+          </a:prstGeom>
+        </p:spPr>
+      </p:pic>
+      <p:sp>
+        <p:nvSpPr>
+          <p:cNvPr id="4" name="TextBox 3"/>
+          <p:cNvSpPr txBox="1"/>
+          <p:nvPr/>
+        </p:nvSpPr>
+        <p:spPr>
+          <a:xfrm>
+            <a:off x="548640" y="5897880"/>
+            <a:ext cx="11064240" cy="411480"/>
+          </a:xfrm>
+          <a:prstGeom prst="rect">
+            <a:avLst/>
+          </a:prstGeom>
+          <a:noFill/>
+        </p:spPr>
+        <p:txBody>
+          <a:bodyPr wrap="square">
+            <a:noAutofit/>
+          </a:bodyPr>
+          <a:lstStyle/>
+          <a:p>
+            <a:pPr>
+              <a:lnSpc>
+                <a:spcPts val="2200"/>
+              </a:lnSpc>
+              <a:defRPr sz="1200" b="0">
+                <a:solidFill>
+                  <a:srgbClr val="333333"/>
+                </a:solidFill>
+                <a:latin typeface="Calibri"/>
+              </a:defRPr>
+            </a:pPr>
+            <a:r>
+              <a:t>Module 7: UVM layers, agents, and checkers for this phase.</a:t>
+            </a:r>
+          </a:p>
+        </p:txBody>
+      </p:sp>
+      <p:sp>
+        <p:nvSpPr>
+          <p:cNvPr id="5" name="TextBox 4"/>
           <p:cNvSpPr txBox="1"/>
           <p:nvPr/>
         </p:nvSpPr>
@@ -4122,7 +4617,7 @@
               </a:defRPr>
             </a:pPr>
             <a:r>
-              <a:t>Module 7 self-check</a:t>
+              <a:t>1. Block hierarchy</a:t>
             </a:r>
           </a:p>
         </p:txBody>
@@ -4135,15 +4630,13 @@
         </p:nvSpPr>
         <p:spPr>
           <a:xfrm>
-            <a:off x="548640" y="1051560"/>
-            <a:ext cx="11064240" cy="914400"/>
+            <a:off x="548640" y="1234440"/>
+            <a:ext cx="11064240" cy="4937760"/>
           </a:xfrm>
           <a:prstGeom prst="rect">
             <a:avLst/>
           </a:prstGeom>
-          <a:solidFill>
-            <a:srgbClr val="F4F4F4"/>
-          </a:solidFill>
+          <a:noFill/>
         </p:spPr>
         <p:txBody>
           <a:bodyPr wrap="square">
@@ -4156,48 +4649,43 @@
                 <a:spcPts val="2200"/>
               </a:lnSpc>
               <a:spcAft>
-                <a:spcPts val="200"/>
+                <a:spcPts val="1000"/>
               </a:spcAft>
               <a:defRPr sz="2000" b="0">
                 <a:solidFill>
                   <a:srgbClr val="333333"/>
                 </a:solidFill>
-                <a:latin typeface="Consolas"/>
-              </a:defRPr>
-            </a:pPr>
-            <a:r>
-              <a:t>$ ./scripts/module7.sh --check</a:t>
-            </a:r>
-          </a:p>
-        </p:txBody>
-      </p:sp>
-      <p:pic>
-        <p:nvPicPr>
-          <p:cNvPr id="4" name="Picture 3" descr="module7_check.png"/>
-          <p:cNvPicPr>
-            <a:picLocks noChangeAspect="1"/>
-          </p:cNvPicPr>
-          <p:nvPr/>
-        </p:nvPicPr>
-        <p:blipFill>
-          <a:blip r:embed="rId2"/>
-          <a:stretch>
-            <a:fillRect/>
-          </a:stretch>
-        </p:blipFill>
-        <p:spPr>
-          <a:xfrm>
-            <a:off x="548640" y="1965960"/>
-            <a:ext cx="7071358" cy="3977639"/>
-          </a:xfrm>
-          <a:prstGeom prst="rect">
-            <a:avLst/>
-          </a:prstGeom>
-        </p:spPr>
-      </p:pic>
-      <p:sp>
-        <p:nvSpPr>
-          <p:cNvPr id="5" name="TextBox 4"/>
+                <a:latin typeface="Calibri"/>
+              </a:defRPr>
+            </a:pPr>
+            <a:r>
+              <a:t>• top_i2c_baseline → `clk_div` + `i2c_master`; C++</a:t>
+            </a:r>
+          </a:p>
+          <a:p>
+            <a:pPr>
+              <a:lnSpc>
+                <a:spcPts val="2200"/>
+              </a:lnSpc>
+              <a:spcAft>
+                <a:spcPts val="1000"/>
+              </a:spcAft>
+              <a:defRPr sz="2000" b="0">
+                <a:solidFill>
+                  <a:srgbClr val="333333"/>
+                </a:solidFill>
+                <a:latin typeface="Calibri"/>
+              </a:defRPr>
+            </a:pPr>
+            <a:r>
+              <a:t>      drives `clk`/`rst_n`.</a:t>
+            </a:r>
+          </a:p>
+        </p:txBody>
+      </p:sp>
+      <p:sp>
+        <p:nvSpPr>
+          <p:cNvPr id="4" name="TextBox 3"/>
           <p:cNvSpPr txBox="1"/>
           <p:nvPr/>
         </p:nvSpPr>
@@ -4286,7 +4774,7 @@
               </a:defRPr>
             </a:pPr>
             <a:r>
-              <a:t>Example 1: I²C baseline</a:t>
+              <a:t>2. I²C master FSM</a:t>
             </a:r>
           </a:p>
         </p:txBody>
@@ -4328,7 +4816,7 @@
               </a:defRPr>
             </a:pPr>
             <a:r>
-              <a:t>• Drives a single write transaction (START → address+W</a:t>
+              <a:t>• States: IDLE → START → ADDR_BITS → DATA_BITS → STOP.</a:t>
             </a:r>
           </a:p>
           <a:p>
@@ -4347,7 +4835,7 @@
               </a:defRPr>
             </a:pPr>
             <a:r>
-              <a:t>      → data → STOP)</a:t>
+              <a:t>• One teaching write: 7-bit `addr` + data byte on</a:t>
             </a:r>
           </a:p>
           <a:p>
@@ -4366,45 +4854,7 @@
               </a:defRPr>
             </a:pPr>
             <a:r>
-              <a:t>• Includes a simple bus monitor that samples SDA on</a:t>
-            </a:r>
-          </a:p>
-          <a:p>
-            <a:pPr>
-              <a:lnSpc>
-                <a:spcPts val="2200"/>
-              </a:lnSpc>
-              <a:spcAft>
-                <a:spcPts val="1000"/>
-              </a:spcAft>
-              <a:defRPr sz="2000" b="0">
-                <a:solidFill>
-                  <a:srgbClr val="333333"/>
-                </a:solidFill>
-                <a:latin typeface="Calibri"/>
-              </a:defRPr>
-            </a:pPr>
-            <a:r>
-              <a:t>      SCL rising edges to reconstruct bytes</a:t>
-            </a:r>
-          </a:p>
-          <a:p>
-            <a:pPr>
-              <a:lnSpc>
-                <a:spcPts val="2200"/>
-              </a:lnSpc>
-              <a:spcAft>
-                <a:spcPts val="1000"/>
-              </a:spcAft>
-              <a:defRPr sz="2000" b="0">
-                <a:solidFill>
-                  <a:srgbClr val="333333"/>
-                </a:solidFill>
-                <a:latin typeface="Calibri"/>
-              </a:defRPr>
-            </a:pPr>
-            <a:r>
-              <a:t>• No UVM</a:t>
+              <a:t>      `scl`/`sda` (push-pull model).</a:t>
             </a:r>
           </a:p>
         </p:txBody>
@@ -4500,7 +4950,7 @@
               </a:defRPr>
             </a:pPr>
             <a:r>
-              <a:t>Demo: I²C baseline</a:t>
+              <a:t>3. Teaching vs real I²C</a:t>
             </a:r>
           </a:p>
         </p:txBody>
@@ -4513,15 +4963,13 @@
         </p:nvSpPr>
         <p:spPr>
           <a:xfrm>
-            <a:off x="548640" y="1051560"/>
-            <a:ext cx="11064240" cy="914400"/>
+            <a:off x="548640" y="1234440"/>
+            <a:ext cx="11064240" cy="4937760"/>
           </a:xfrm>
           <a:prstGeom prst="rect">
             <a:avLst/>
           </a:prstGeom>
-          <a:solidFill>
-            <a:srgbClr val="F4F4F4"/>
-          </a:solidFill>
+          <a:noFill/>
         </p:spPr>
         <p:txBody>
           <a:bodyPr wrap="square">
@@ -4534,48 +4982,43 @@
                 <a:spcPts val="2200"/>
               </a:lnSpc>
               <a:spcAft>
-                <a:spcPts val="200"/>
+                <a:spcPts val="1000"/>
               </a:spcAft>
               <a:defRPr sz="2000" b="0">
                 <a:solidFill>
                   <a:srgbClr val="333333"/>
                 </a:solidFill>
-                <a:latin typeface="Consolas"/>
-              </a:defRPr>
-            </a:pPr>
-            <a:r>
-              <a:t>$ ./scripts/module7.sh --run</a:t>
-            </a:r>
-          </a:p>
-        </p:txBody>
-      </p:sp>
-      <p:pic>
-        <p:nvPicPr>
-          <p:cNvPr id="4" name="Picture 3" descr="ex01_i2c_baseline.png"/>
-          <p:cNvPicPr>
-            <a:picLocks noChangeAspect="1"/>
-          </p:cNvPicPr>
-          <p:nvPr/>
-        </p:nvPicPr>
-        <p:blipFill>
-          <a:blip r:embed="rId2"/>
-          <a:stretch>
-            <a:fillRect/>
-          </a:stretch>
-        </p:blipFill>
-        <p:spPr>
-          <a:xfrm>
-            <a:off x="548640" y="1965960"/>
-            <a:ext cx="7071358" cy="3977639"/>
-          </a:xfrm>
-          <a:prstGeom prst="rect">
-            <a:avLst/>
-          </a:prstGeom>
-        </p:spPr>
-      </p:pic>
-      <p:sp>
-        <p:nvSpPr>
-          <p:cNvPr id="5" name="TextBox 4"/>
+                <a:latin typeface="Calibri"/>
+              </a:defRPr>
+            </a:pPr>
+            <a:r>
+              <a:t>• No open-drain, ACK/NACK, or arbitration in baseline</a:t>
+            </a:r>
+          </a:p>
+          <a:p>
+            <a:pPr>
+              <a:lnSpc>
+                <a:spcPts val="2200"/>
+              </a:lnSpc>
+              <a:spcAft>
+                <a:spcPts val="1000"/>
+              </a:spcAft>
+              <a:defRPr sz="2000" b="0">
+                <a:solidFill>
+                  <a:srgbClr val="333333"/>
+                </a:solidFill>
+                <a:latin typeface="Calibri"/>
+              </a:defRPr>
+            </a:pPr>
+            <a:r>
+              <a:t>      — learn sequencing first.</a:t>
+            </a:r>
+          </a:p>
+        </p:txBody>
+      </p:sp>
+      <p:sp>
+        <p:nvSpPr>
+          <p:cNvPr id="4" name="TextBox 3"/>
           <p:cNvSpPr txBox="1"/>
           <p:nvPr/>
         </p:nvSpPr>
@@ -4664,7 +5107,7 @@
               </a:defRPr>
             </a:pPr>
             <a:r>
-              <a:t>Practice &amp; assessment</a:t>
+              <a:t>Verification &amp; testing methods</a:t>
             </a:r>
           </a:p>
         </p:txBody>
@@ -4760,21 +5203,45 @@
               </a:defRPr>
             </a:pPr>
             <a:r>
-              <a:t>Exercises</a:t>
-            </a:r>
-          </a:p>
-        </p:txBody>
-      </p:sp>
-      <p:sp>
-        <p:nvSpPr>
-          <p:cNvPr id="3" name="TextBox 2"/>
+              <a:t>Testing and closure flow</a:t>
+            </a:r>
+          </a:p>
+        </p:txBody>
+      </p:sp>
+      <p:pic>
+        <p:nvPicPr>
+          <p:cNvPr id="3" name="Picture 2" descr="testing_methods.png"/>
+          <p:cNvPicPr>
+            <a:picLocks noChangeAspect="1"/>
+          </p:cNvPicPr>
+          <p:nvPr/>
+        </p:nvPicPr>
+        <p:blipFill>
+          <a:blip r:embed="rId2"/>
+          <a:stretch>
+            <a:fillRect/>
+          </a:stretch>
+        </p:blipFill>
+        <p:spPr>
+          <a:xfrm>
+            <a:off x="548640" y="1143000"/>
+            <a:ext cx="8128000" cy="4572000"/>
+          </a:xfrm>
+          <a:prstGeom prst="rect">
+            <a:avLst/>
+          </a:prstGeom>
+        </p:spPr>
+      </p:pic>
+      <p:sp>
+        <p:nvSpPr>
+          <p:cNvPr id="4" name="TextBox 3"/>
           <p:cNvSpPr txBox="1"/>
           <p:nvPr/>
         </p:nvSpPr>
         <p:spPr>
           <a:xfrm>
-            <a:off x="548640" y="1234440"/>
-            <a:ext cx="11064240" cy="4937760"/>
+            <a:off x="548640" y="5897880"/>
+            <a:ext cx="11064240" cy="411480"/>
           </a:xfrm>
           <a:prstGeom prst="rect">
             <a:avLst/>
@@ -4791,10 +5258,7 @@
               <a:lnSpc>
                 <a:spcPts val="2200"/>
               </a:lnSpc>
-              <a:spcAft>
-                <a:spcPts val="1000"/>
-              </a:spcAft>
-              <a:defRPr sz="2000" b="0">
+              <a:defRPr sz="1200" b="0">
                 <a:solidFill>
                   <a:srgbClr val="333333"/>
                 </a:solidFill>
@@ -4802,71 +5266,14 @@
               </a:defRPr>
             </a:pPr>
             <a:r>
-              <a:t>• Run i2c_baseline</a:t>
-            </a:r>
-          </a:p>
-          <a:p>
-            <a:pPr>
-              <a:lnSpc>
-                <a:spcPts val="2200"/>
-              </a:lnSpc>
-              <a:spcAft>
-                <a:spcPts val="1000"/>
-              </a:spcAft>
-              <a:defRPr sz="2000" b="0">
-                <a:solidFill>
-                  <a:srgbClr val="333333"/>
-                </a:solidFill>
-                <a:latin typeface="Calibri"/>
-              </a:defRPr>
-            </a:pPr>
-            <a:r>
-              <a:t>• Trace one transfer</a:t>
-            </a:r>
-          </a:p>
-          <a:p>
-            <a:pPr>
-              <a:lnSpc>
-                <a:spcPts val="2200"/>
-              </a:lnSpc>
-              <a:spcAft>
-                <a:spcPts val="1000"/>
-              </a:spcAft>
-              <a:defRPr sz="2000" b="0">
-                <a:solidFill>
-                  <a:srgbClr val="333333"/>
-                </a:solidFill>
-                <a:latin typeface="Calibri"/>
-              </a:defRPr>
-            </a:pPr>
-            <a:r>
-              <a:t>• Bus monitor</a:t>
-            </a:r>
-          </a:p>
-          <a:p>
-            <a:pPr>
-              <a:lnSpc>
-                <a:spcPts val="2200"/>
-              </a:lnSpc>
-              <a:spcAft>
-                <a:spcPts val="1000"/>
-              </a:spcAft>
-              <a:defRPr sz="2000" b="0">
-                <a:solidFill>
-                  <a:srgbClr val="333333"/>
-                </a:solidFill>
-                <a:latin typeface="Calibri"/>
-              </a:defRPr>
-            </a:pPr>
-            <a:r>
-              <a:t>• Optional: Waveforms</a:t>
-            </a:r>
-          </a:p>
-        </p:txBody>
-      </p:sp>
-      <p:sp>
-        <p:nvSpPr>
-          <p:cNvPr id="4" name="TextBox 3"/>
+              <a:t>Module 7: how tests, checks, and metrics close verification goals.</a:t>
+            </a:r>
+          </a:p>
+        </p:txBody>
+      </p:sp>
+      <p:sp>
+        <p:nvSpPr>
+          <p:cNvPr id="5" name="TextBox 4"/>
           <p:cNvSpPr txBox="1"/>
           <p:nvPr/>
         </p:nvSpPr>
@@ -4955,7 +5362,7 @@
               </a:defRPr>
             </a:pPr>
             <a:r>
-              <a:t>Assessment checklist</a:t>
+              <a:t>1. Inline bus monitor</a:t>
             </a:r>
           </a:p>
         </p:txBody>
@@ -4997,7 +5404,7 @@
               </a:defRPr>
             </a:pPr>
             <a:r>
-              <a:t>• Can describe I²C START, STOP, address+R/W, and data</a:t>
+              <a:t>• Top module detects START; samples SDA on rising SCL;</a:t>
             </a:r>
           </a:p>
           <a:p>
@@ -5016,83 +5423,7 @@
               </a:defRPr>
             </a:pPr>
             <a:r>
-              <a:t>      phase (and ACK/NACK concept).</a:t>
-            </a:r>
-          </a:p>
-          <a:p>
-            <a:pPr>
-              <a:lnSpc>
-                <a:spcPts val="2200"/>
-              </a:lnSpc>
-              <a:spcAft>
-                <a:spcPts val="1000"/>
-              </a:spcAft>
-              <a:defRPr sz="2000" b="0">
-                <a:solidFill>
-                  <a:srgbClr val="333333"/>
-                </a:solidFill>
-                <a:latin typeface="Calibri"/>
-              </a:defRPr>
-            </a:pPr>
-            <a:r>
-              <a:t>• Can explain the role of i2c_master and clk_div; know</a:t>
-            </a:r>
-          </a:p>
-          <a:p>
-            <a:pPr>
-              <a:lnSpc>
-                <a:spcPts val="2200"/>
-              </a:lnSpc>
-              <a:spcAft>
-                <a:spcPts val="1000"/>
-              </a:spcAft>
-              <a:defRPr sz="2000" b="0">
-                <a:solidFill>
-                  <a:srgbClr val="333333"/>
-                </a:solidFill>
-                <a:latin typeface="Calibri"/>
-              </a:defRPr>
-            </a:pPr>
-            <a:r>
-              <a:t>      the baseline uses push-pull (simplified).</a:t>
-            </a:r>
-          </a:p>
-          <a:p>
-            <a:pPr>
-              <a:lnSpc>
-                <a:spcPts val="2200"/>
-              </a:lnSpc>
-              <a:spcAft>
-                <a:spcPts val="1000"/>
-              </a:spcAft>
-              <a:defRPr sz="2000" b="0">
-                <a:solidFill>
-                  <a:srgbClr val="333333"/>
-                </a:solidFill>
-                <a:latin typeface="Calibri"/>
-              </a:defRPr>
-            </a:pPr>
-            <a:r>
-              <a:t>• Can run i2c_baseline and interpret the test result.</a:t>
-            </a:r>
-          </a:p>
-          <a:p>
-            <a:pPr>
-              <a:lnSpc>
-                <a:spcPts val="2200"/>
-              </a:lnSpc>
-              <a:spcAft>
-                <a:spcPts val="1000"/>
-              </a:spcAft>
-              <a:defRPr sz="2000" b="0">
-                <a:solidFill>
-                  <a:srgbClr val="333333"/>
-                </a:solidFill>
-                <a:latin typeface="Calibri"/>
-              </a:defRPr>
-            </a:pPr>
-            <a:r>
-              <a:t>• Ready for Module 8: I²C UVM+SV verification.</a:t>
+              <a:t>      rebuilds addr+W and data.</a:t>
             </a:r>
           </a:p>
         </p:txBody>
@@ -5188,7 +5519,7 @@
               </a:defRPr>
             </a:pPr>
             <a:r>
-              <a:t>Summary &amp; next steps</a:t>
+              <a:t>2. Self-check flow</a:t>
             </a:r>
           </a:p>
         </p:txBody>
@@ -5230,7 +5561,7 @@
               </a:defRPr>
             </a:pPr>
             <a:r>
-              <a:t>• Understand the I²C protocol (start/stop, addressing,</a:t>
+              <a:t>• Compare captured bytes to driven `addr`/`data_in`;</a:t>
             </a:r>
           </a:p>
           <a:p>
@@ -5249,9 +5580,128 @@
               </a:defRPr>
             </a:pPr>
             <a:r>
-              <a:t>      ACK/NACK), translate it to RTL (simple master…</a:t>
-            </a:r>
-          </a:p>
+              <a:t>      print `I2C baseline test PASS`.</a:t>
+            </a:r>
+          </a:p>
+        </p:txBody>
+      </p:sp>
+      <p:sp>
+        <p:nvSpPr>
+          <p:cNvPr id="4" name="TextBox 3"/>
+          <p:cNvSpPr txBox="1"/>
+          <p:nvPr/>
+        </p:nvSpPr>
+        <p:spPr>
+          <a:xfrm>
+            <a:off x="548640" y="6355080"/>
+            <a:ext cx="11064240" cy="320040"/>
+          </a:xfrm>
+          <a:prstGeom prst="rect">
+            <a:avLst/>
+          </a:prstGeom>
+          <a:noFill/>
+        </p:spPr>
+        <p:txBody>
+          <a:bodyPr wrap="square">
+            <a:noAutofit/>
+          </a:bodyPr>
+          <a:lstStyle/>
+          <a:p>
+            <a:pPr algn="r">
+              <a:lnSpc>
+                <a:spcPts val="2200"/>
+              </a:lnSpc>
+              <a:defRPr sz="1000" b="0">
+                <a:solidFill>
+                  <a:srgbClr val="666666"/>
+                </a:solidFill>
+                <a:latin typeface="Calibri"/>
+              </a:defRPr>
+            </a:pPr>
+            <a:r>
+              <a:t>learn_uart_spi_i2c / Module 7</a:t>
+            </a:r>
+          </a:p>
+        </p:txBody>
+      </p:sp>
+    </p:spTree>
+  </p:cSld>
+  <p:clrMapOvr>
+    <a:masterClrMapping/>
+  </p:clrMapOvr>
+</p:sld>
+</file>
+
+<file path=ppt/slides/slide18.xml><?xml version="1.0" encoding="utf-8"?>
+<p:sld xmlns:a="http://schemas.openxmlformats.org/drawingml/2006/main" xmlns:p="http://schemas.openxmlformats.org/presentationml/2006/main" xmlns:r="http://schemas.openxmlformats.org/officeDocument/2006/relationships">
+  <p:cSld>
+    <p:spTree>
+      <p:nvGrpSpPr>
+        <p:cNvPr id="1" name=""/>
+        <p:cNvGrpSpPr/>
+        <p:nvPr/>
+      </p:nvGrpSpPr>
+      <p:grpSpPr/>
+      <p:sp>
+        <p:nvSpPr>
+          <p:cNvPr id="2" name="TextBox 1"/>
+          <p:cNvSpPr txBox="1"/>
+          <p:nvPr/>
+        </p:nvSpPr>
+        <p:spPr>
+          <a:xfrm>
+            <a:off x="548640" y="411480"/>
+            <a:ext cx="11064240" cy="777240"/>
+          </a:xfrm>
+          <a:prstGeom prst="rect">
+            <a:avLst/>
+          </a:prstGeom>
+          <a:noFill/>
+        </p:spPr>
+        <p:txBody>
+          <a:bodyPr wrap="square">
+            <a:noAutofit/>
+          </a:bodyPr>
+          <a:lstStyle/>
+          <a:p>
+            <a:pPr>
+              <a:lnSpc>
+                <a:spcPts val="2200"/>
+              </a:lnSpc>
+              <a:defRPr sz="2800" b="1">
+                <a:solidFill>
+                  <a:srgbClr val="1A1A2E"/>
+                </a:solidFill>
+                <a:latin typeface="Calibri"/>
+              </a:defRPr>
+            </a:pPr>
+            <a:r>
+              <a:t>3. Path to Module 8</a:t>
+            </a:r>
+          </a:p>
+        </p:txBody>
+      </p:sp>
+      <p:sp>
+        <p:nvSpPr>
+          <p:cNvPr id="3" name="TextBox 2"/>
+          <p:cNvSpPr txBox="1"/>
+          <p:nvPr/>
+        </p:nvSpPr>
+        <p:spPr>
+          <a:xfrm>
+            <a:off x="548640" y="1234440"/>
+            <a:ext cx="11064240" cy="4937760"/>
+          </a:xfrm>
+          <a:prstGeom prst="rect">
+            <a:avLst/>
+          </a:prstGeom>
+          <a:noFill/>
+        </p:spPr>
+        <p:txBody>
+          <a:bodyPr wrap="square">
+            <a:noAutofit/>
+          </a:bodyPr>
+          <a:lstStyle/>
           <a:p>
             <a:pPr>
               <a:lnSpc>
@@ -5268,7 +5718,7 @@
               </a:defRPr>
             </a:pPr>
             <a:r>
-              <a:t>• Complete module7/CHECKLIST.md</a:t>
+              <a:t>• Move monitor into I2cMonitor; scoreboard splits</a:t>
             </a:r>
           </a:p>
           <a:p>
@@ -5287,26 +5737,7 @@
               </a:defRPr>
             </a:pPr>
             <a:r>
-              <a:t>• Run ./scripts/module7.sh --check</a:t>
-            </a:r>
-          </a:p>
-          <a:p>
-            <a:pPr>
-              <a:lnSpc>
-                <a:spcPts val="2200"/>
-              </a:lnSpc>
-              <a:spcAft>
-                <a:spcPts val="1000"/>
-              </a:spcAft>
-              <a:defRPr sz="2000" b="0">
-                <a:solidFill>
-                  <a:srgbClr val="333333"/>
-                </a:solidFill>
-                <a:latin typeface="Calibri"/>
-              </a:defRPr>
-            </a:pPr>
-            <a:r>
-              <a:t>• Next: I²C UVM+SV</a:t>
+              <a:t>      address and data phases.</a:t>
             </a:r>
           </a:p>
         </p:txBody>
@@ -5314,6 +5745,102 @@
       <p:sp>
         <p:nvSpPr>
           <p:cNvPr id="4" name="TextBox 3"/>
+          <p:cNvSpPr txBox="1"/>
+          <p:nvPr/>
+        </p:nvSpPr>
+        <p:spPr>
+          <a:xfrm>
+            <a:off x="548640" y="6355080"/>
+            <a:ext cx="11064240" cy="320040"/>
+          </a:xfrm>
+          <a:prstGeom prst="rect">
+            <a:avLst/>
+          </a:prstGeom>
+          <a:noFill/>
+        </p:spPr>
+        <p:txBody>
+          <a:bodyPr wrap="square">
+            <a:noAutofit/>
+          </a:bodyPr>
+          <a:lstStyle/>
+          <a:p>
+            <a:pPr algn="r">
+              <a:lnSpc>
+                <a:spcPts val="2200"/>
+              </a:lnSpc>
+              <a:defRPr sz="1000" b="0">
+                <a:solidFill>
+                  <a:srgbClr val="666666"/>
+                </a:solidFill>
+                <a:latin typeface="Calibri"/>
+              </a:defRPr>
+            </a:pPr>
+            <a:r>
+              <a:t>learn_uart_spi_i2c / Module 7</a:t>
+            </a:r>
+          </a:p>
+        </p:txBody>
+      </p:sp>
+    </p:spTree>
+  </p:cSld>
+  <p:clrMapOvr>
+    <a:masterClrMapping/>
+  </p:clrMapOvr>
+</p:sld>
+</file>
+
+<file path=ppt/slides/slide19.xml><?xml version="1.0" encoding="utf-8"?>
+<p:sld xmlns:a="http://schemas.openxmlformats.org/drawingml/2006/main" xmlns:p="http://schemas.openxmlformats.org/presentationml/2006/main" xmlns:r="http://schemas.openxmlformats.org/officeDocument/2006/relationships">
+  <p:cSld>
+    <p:spTree>
+      <p:nvGrpSpPr>
+        <p:cNvPr id="1" name=""/>
+        <p:cNvGrpSpPr/>
+        <p:nvPr/>
+      </p:nvGrpSpPr>
+      <p:grpSpPr/>
+      <p:sp>
+        <p:nvSpPr>
+          <p:cNvPr id="2" name="TextBox 1"/>
+          <p:cNvSpPr txBox="1"/>
+          <p:nvPr/>
+        </p:nvSpPr>
+        <p:spPr>
+          <a:xfrm>
+            <a:off x="548640" y="2743200"/>
+            <a:ext cx="11064240" cy="1371600"/>
+          </a:xfrm>
+          <a:prstGeom prst="rect">
+            <a:avLst/>
+          </a:prstGeom>
+          <a:noFill/>
+        </p:spPr>
+        <p:txBody>
+          <a:bodyPr wrap="square">
+            <a:noAutofit/>
+          </a:bodyPr>
+          <a:lstStyle/>
+          <a:p>
+            <a:pPr algn="ctr">
+              <a:lnSpc>
+                <a:spcPts val="2200"/>
+              </a:lnSpc>
+              <a:defRPr sz="3600" b="1">
+                <a:solidFill>
+                  <a:srgbClr val="1A1A2E"/>
+                </a:solidFill>
+                <a:latin typeface="Calibri"/>
+              </a:defRPr>
+            </a:pPr>
+            <a:r>
+              <a:t>Syllabus topics</a:t>
+            </a:r>
+          </a:p>
+        </p:txBody>
+      </p:sp>
+      <p:sp>
+        <p:nvSpPr>
+          <p:cNvPr id="3" name="TextBox 2"/>
           <p:cNvSpPr txBox="1"/>
           <p:nvPr/>
         </p:nvSpPr>
@@ -5444,7 +5971,7 @@
               </a:defRPr>
             </a:pPr>
             <a:r>
-              <a:t>• How START/STOP are detected/produced (SDA</a:t>
+              <a:t>• RTL block architecture: `clk_div` + `i2c_master` FSM</a:t>
             </a:r>
           </a:p>
           <a:p>
@@ -5463,7 +5990,7 @@
               </a:defRPr>
             </a:pPr>
             <a:r>
-              <a:t>      transitions while SCL high).</a:t>
+              <a:t>      (START → addr → data → STOP).</a:t>
             </a:r>
           </a:p>
           <a:p>
@@ -5482,7 +6009,7 @@
               </a:defRPr>
             </a:pPr>
             <a:r>
-              <a:t>• How the address + R/W bit and data bytes are</a:t>
+              <a:t>• Baseline verification: Directed writes plus inline</a:t>
             </a:r>
           </a:p>
           <a:p>
@@ -5501,7 +6028,7 @@
               </a:defRPr>
             </a:pPr>
             <a:r>
-              <a:t>      serialized on SDA.</a:t>
+              <a:t>      bus monitor (sample SDA on rising SCL).</a:t>
             </a:r>
           </a:p>
           <a:p>
@@ -5520,7 +6047,7 @@
               </a:defRPr>
             </a:pPr>
             <a:r>
-              <a:t>• How to build a basic “bus monitor” that reconstructs</a:t>
+              <a:t>• Protocol vs simplification: Real open-drain/ACK vs</a:t>
             </a:r>
           </a:p>
           <a:p>
@@ -5539,7 +6066,1868 @@
               </a:defRPr>
             </a:pPr>
             <a:r>
-              <a:t>      bytes by sampling SDA on SCL rising edges.</a:t>
+              <a:t>      this repo’s push-pull teaching model.</a:t>
+            </a:r>
+          </a:p>
+          <a:p>
+            <a:pPr>
+              <a:lnSpc>
+                <a:spcPts val="2200"/>
+              </a:lnSpc>
+              <a:spcAft>
+                <a:spcPts val="1000"/>
+              </a:spcAft>
+              <a:defRPr sz="2000" b="0">
+                <a:solidFill>
+                  <a:srgbClr val="333333"/>
+                </a:solidFill>
+                <a:latin typeface="Calibri"/>
+              </a:defRPr>
+            </a:pPr>
+            <a:r>
+              <a:t>• Path to Module 8: Same DUT with UVM</a:t>
+            </a:r>
+          </a:p>
+          <a:p>
+            <a:pPr>
+              <a:lnSpc>
+                <a:spcPts val="2200"/>
+              </a:lnSpc>
+              <a:spcAft>
+                <a:spcPts val="1000"/>
+              </a:spcAft>
+              <a:defRPr sz="2000" b="0">
+                <a:solidFill>
+                  <a:srgbClr val="333333"/>
+                </a:solidFill>
+                <a:latin typeface="Calibri"/>
+              </a:defRPr>
+            </a:pPr>
+            <a:r>
+              <a:t>      monitor/scoreboard on address and data phases.</a:t>
+            </a:r>
+          </a:p>
+        </p:txBody>
+      </p:sp>
+      <p:sp>
+        <p:nvSpPr>
+          <p:cNvPr id="4" name="TextBox 3"/>
+          <p:cNvSpPr txBox="1"/>
+          <p:nvPr/>
+        </p:nvSpPr>
+        <p:spPr>
+          <a:xfrm>
+            <a:off x="548640" y="6355080"/>
+            <a:ext cx="11064240" cy="320040"/>
+          </a:xfrm>
+          <a:prstGeom prst="rect">
+            <a:avLst/>
+          </a:prstGeom>
+          <a:noFill/>
+        </p:spPr>
+        <p:txBody>
+          <a:bodyPr wrap="square">
+            <a:noAutofit/>
+          </a:bodyPr>
+          <a:lstStyle/>
+          <a:p>
+            <a:pPr algn="r">
+              <a:lnSpc>
+                <a:spcPts val="2200"/>
+              </a:lnSpc>
+              <a:defRPr sz="1000" b="0">
+                <a:solidFill>
+                  <a:srgbClr val="666666"/>
+                </a:solidFill>
+                <a:latin typeface="Calibri"/>
+              </a:defRPr>
+            </a:pPr>
+            <a:r>
+              <a:t>learn_uart_spi_i2c / Module 7</a:t>
+            </a:r>
+          </a:p>
+        </p:txBody>
+      </p:sp>
+    </p:spTree>
+  </p:cSld>
+  <p:clrMapOvr>
+    <a:masterClrMapping/>
+  </p:clrMapOvr>
+</p:sld>
+</file>
+
+<file path=ppt/slides/slide20.xml><?xml version="1.0" encoding="utf-8"?>
+<p:sld xmlns:a="http://schemas.openxmlformats.org/drawingml/2006/main" xmlns:p="http://schemas.openxmlformats.org/presentationml/2006/main" xmlns:r="http://schemas.openxmlformats.org/officeDocument/2006/relationships">
+  <p:cSld>
+    <p:spTree>
+      <p:nvGrpSpPr>
+        <p:cNvPr id="1" name=""/>
+        <p:cNvGrpSpPr/>
+        <p:nvPr/>
+      </p:nvGrpSpPr>
+      <p:grpSpPr/>
+      <p:sp>
+        <p:nvSpPr>
+          <p:cNvPr id="2" name="TextBox 1"/>
+          <p:cNvSpPr txBox="1"/>
+          <p:nvPr/>
+        </p:nvSpPr>
+        <p:spPr>
+          <a:xfrm>
+            <a:off x="548640" y="411480"/>
+            <a:ext cx="11064240" cy="777240"/>
+          </a:xfrm>
+          <a:prstGeom prst="rect">
+            <a:avLst/>
+          </a:prstGeom>
+          <a:noFill/>
+        </p:spPr>
+        <p:txBody>
+          <a:bodyPr wrap="square">
+            <a:noAutofit/>
+          </a:bodyPr>
+          <a:lstStyle/>
+          <a:p>
+            <a:pPr>
+              <a:lnSpc>
+                <a:spcPts val="2200"/>
+              </a:lnSpc>
+              <a:defRPr sz="2800" b="1">
+                <a:solidFill>
+                  <a:srgbClr val="1A1A2E"/>
+                </a:solidFill>
+                <a:latin typeface="Calibri"/>
+              </a:defRPr>
+            </a:pPr>
+            <a:r>
+              <a:t>1. I²C Protocol Essentials</a:t>
+            </a:r>
+          </a:p>
+        </p:txBody>
+      </p:sp>
+      <p:sp>
+        <p:nvSpPr>
+          <p:cNvPr id="3" name="TextBox 2"/>
+          <p:cNvSpPr txBox="1"/>
+          <p:nvPr/>
+        </p:nvSpPr>
+        <p:spPr>
+          <a:xfrm>
+            <a:off x="548640" y="1234440"/>
+            <a:ext cx="11064240" cy="4937760"/>
+          </a:xfrm>
+          <a:prstGeom prst="rect">
+            <a:avLst/>
+          </a:prstGeom>
+          <a:noFill/>
+        </p:spPr>
+        <p:txBody>
+          <a:bodyPr wrap="square">
+            <a:noAutofit/>
+          </a:bodyPr>
+          <a:lstStyle/>
+          <a:p>
+            <a:pPr>
+              <a:lnSpc>
+                <a:spcPts val="2200"/>
+              </a:lnSpc>
+              <a:spcAft>
+                <a:spcPts val="1000"/>
+              </a:spcAft>
+              <a:defRPr sz="2000" b="0">
+                <a:solidFill>
+                  <a:srgbClr val="333333"/>
+                </a:solidFill>
+                <a:latin typeface="Calibri"/>
+              </a:defRPr>
+            </a:pPr>
+            <a:r>
+              <a:t>• Bus idle: SCL=1, SDA=1.</a:t>
+            </a:r>
+          </a:p>
+          <a:p>
+            <a:pPr>
+              <a:lnSpc>
+                <a:spcPts val="2200"/>
+              </a:lnSpc>
+              <a:spcAft>
+                <a:spcPts val="1000"/>
+              </a:spcAft>
+              <a:defRPr sz="2000" b="0">
+                <a:solidFill>
+                  <a:srgbClr val="333333"/>
+                </a:solidFill>
+                <a:latin typeface="Calibri"/>
+              </a:defRPr>
+            </a:pPr>
+            <a:r>
+              <a:t>• START: SDA goes 1→0 while SCL is 1.</a:t>
+            </a:r>
+          </a:p>
+          <a:p>
+            <a:pPr>
+              <a:lnSpc>
+                <a:spcPts val="2200"/>
+              </a:lnSpc>
+              <a:spcAft>
+                <a:spcPts val="1000"/>
+              </a:spcAft>
+              <a:defRPr sz="2000" b="0">
+                <a:solidFill>
+                  <a:srgbClr val="333333"/>
+                </a:solidFill>
+                <a:latin typeface="Calibri"/>
+              </a:defRPr>
+            </a:pPr>
+            <a:r>
+              <a:t>• STOP: SDA goes 0→1 while SCL is 1.</a:t>
+            </a:r>
+          </a:p>
+          <a:p>
+            <a:pPr>
+              <a:lnSpc>
+                <a:spcPts val="2200"/>
+              </a:lnSpc>
+              <a:spcAft>
+                <a:spcPts val="1000"/>
+              </a:spcAft>
+              <a:defRPr sz="2000" b="0">
+                <a:solidFill>
+                  <a:srgbClr val="333333"/>
+                </a:solidFill>
+                <a:latin typeface="Calibri"/>
+              </a:defRPr>
+            </a:pPr>
+            <a:r>
+              <a:t>• Address phase: 7-bit address + R/W bit (0=write,</a:t>
+            </a:r>
+          </a:p>
+          <a:p>
+            <a:pPr>
+              <a:lnSpc>
+                <a:spcPts val="2200"/>
+              </a:lnSpc>
+              <a:spcAft>
+                <a:spcPts val="1000"/>
+              </a:spcAft>
+              <a:defRPr sz="2000" b="0">
+                <a:solidFill>
+                  <a:srgbClr val="333333"/>
+                </a:solidFill>
+                <a:latin typeface="Calibri"/>
+              </a:defRPr>
+            </a:pPr>
+            <a:r>
+              <a:t>      1=read) sent MSB first.</a:t>
+            </a:r>
+          </a:p>
+          <a:p>
+            <a:pPr>
+              <a:lnSpc>
+                <a:spcPts val="2200"/>
+              </a:lnSpc>
+              <a:spcAft>
+                <a:spcPts val="1000"/>
+              </a:spcAft>
+              <a:defRPr sz="2000" b="0">
+                <a:solidFill>
+                  <a:srgbClr val="333333"/>
+                </a:solidFill>
+                <a:latin typeface="Calibri"/>
+              </a:defRPr>
+            </a:pPr>
+            <a:r>
+              <a:t>• Data phase: 8-bit data bytes sent MSB first.</a:t>
+            </a:r>
+          </a:p>
+          <a:p>
+            <a:pPr>
+              <a:lnSpc>
+                <a:spcPts val="2200"/>
+              </a:lnSpc>
+              <a:spcAft>
+                <a:spcPts val="1000"/>
+              </a:spcAft>
+              <a:defRPr sz="2000" b="0">
+                <a:solidFill>
+                  <a:srgbClr val="333333"/>
+                </a:solidFill>
+                <a:latin typeface="Calibri"/>
+              </a:defRPr>
+            </a:pPr>
+            <a:r>
+              <a:t>• ACK/NACK (concept): receiver pulls SDA low for ACK</a:t>
+            </a:r>
+          </a:p>
+          <a:p>
+            <a:pPr>
+              <a:lnSpc>
+                <a:spcPts val="2200"/>
+              </a:lnSpc>
+              <a:spcAft>
+                <a:spcPts val="1000"/>
+              </a:spcAft>
+              <a:defRPr sz="2000" b="0">
+                <a:solidFill>
+                  <a:srgbClr val="333333"/>
+                </a:solidFill>
+                <a:latin typeface="Calibri"/>
+              </a:defRPr>
+            </a:pPr>
+            <a:r>
+              <a:t>      on the 9th clock; high means NACK.</a:t>
+            </a:r>
+          </a:p>
+        </p:txBody>
+      </p:sp>
+      <p:sp>
+        <p:nvSpPr>
+          <p:cNvPr id="4" name="TextBox 3"/>
+          <p:cNvSpPr txBox="1"/>
+          <p:nvPr/>
+        </p:nvSpPr>
+        <p:spPr>
+          <a:xfrm>
+            <a:off x="548640" y="6355080"/>
+            <a:ext cx="11064240" cy="320040"/>
+          </a:xfrm>
+          <a:prstGeom prst="rect">
+            <a:avLst/>
+          </a:prstGeom>
+          <a:noFill/>
+        </p:spPr>
+        <p:txBody>
+          <a:bodyPr wrap="square">
+            <a:noAutofit/>
+          </a:bodyPr>
+          <a:lstStyle/>
+          <a:p>
+            <a:pPr algn="r">
+              <a:lnSpc>
+                <a:spcPts val="2200"/>
+              </a:lnSpc>
+              <a:defRPr sz="1000" b="0">
+                <a:solidFill>
+                  <a:srgbClr val="666666"/>
+                </a:solidFill>
+                <a:latin typeface="Calibri"/>
+              </a:defRPr>
+            </a:pPr>
+            <a:r>
+              <a:t>learn_uart_spi_i2c / Module 7</a:t>
+            </a:r>
+          </a:p>
+        </p:txBody>
+      </p:sp>
+    </p:spTree>
+  </p:cSld>
+  <p:clrMapOvr>
+    <a:masterClrMapping/>
+  </p:clrMapOvr>
+</p:sld>
+</file>
+
+<file path=ppt/slides/slide21.xml><?xml version="1.0" encoding="utf-8"?>
+<p:sld xmlns:a="http://schemas.openxmlformats.org/drawingml/2006/main" xmlns:p="http://schemas.openxmlformats.org/presentationml/2006/main" xmlns:r="http://schemas.openxmlformats.org/officeDocument/2006/relationships">
+  <p:cSld>
+    <p:spTree>
+      <p:nvGrpSpPr>
+        <p:cNvPr id="1" name=""/>
+        <p:cNvGrpSpPr/>
+        <p:nvPr/>
+      </p:nvGrpSpPr>
+      <p:grpSpPr/>
+      <p:sp>
+        <p:nvSpPr>
+          <p:cNvPr id="2" name="TextBox 1"/>
+          <p:cNvSpPr txBox="1"/>
+          <p:nvPr/>
+        </p:nvSpPr>
+        <p:spPr>
+          <a:xfrm>
+            <a:off x="548640" y="411480"/>
+            <a:ext cx="11064240" cy="777240"/>
+          </a:xfrm>
+          <a:prstGeom prst="rect">
+            <a:avLst/>
+          </a:prstGeom>
+          <a:noFill/>
+        </p:spPr>
+        <p:txBody>
+          <a:bodyPr wrap="square">
+            <a:noAutofit/>
+          </a:bodyPr>
+          <a:lstStyle/>
+          <a:p>
+            <a:pPr>
+              <a:lnSpc>
+                <a:spcPts val="2200"/>
+              </a:lnSpc>
+              <a:defRPr sz="2800" b="1">
+                <a:solidFill>
+                  <a:srgbClr val="1A1A2E"/>
+                </a:solidFill>
+                <a:latin typeface="Calibri"/>
+              </a:defRPr>
+            </a:pPr>
+            <a:r>
+              <a:t>2. Hands-on testbench (i2c_baseline)</a:t>
+            </a:r>
+          </a:p>
+        </p:txBody>
+      </p:sp>
+      <p:sp>
+        <p:nvSpPr>
+          <p:cNvPr id="3" name="TextBox 2"/>
+          <p:cNvSpPr txBox="1"/>
+          <p:nvPr/>
+        </p:nvSpPr>
+        <p:spPr>
+          <a:xfrm>
+            <a:off x="548640" y="1234440"/>
+            <a:ext cx="11064240" cy="4937760"/>
+          </a:xfrm>
+          <a:prstGeom prst="rect">
+            <a:avLst/>
+          </a:prstGeom>
+          <a:noFill/>
+        </p:spPr>
+        <p:txBody>
+          <a:bodyPr wrap="square">
+            <a:noAutofit/>
+          </a:bodyPr>
+          <a:lstStyle/>
+          <a:p>
+            <a:pPr>
+              <a:lnSpc>
+                <a:spcPts val="2200"/>
+              </a:lnSpc>
+              <a:spcAft>
+                <a:spcPts val="1000"/>
+              </a:spcAft>
+              <a:defRPr sz="2000" b="0">
+                <a:solidFill>
+                  <a:srgbClr val="333333"/>
+                </a:solidFill>
+                <a:latin typeface="Calibri"/>
+              </a:defRPr>
+            </a:pPr>
+            <a:r>
+              <a:t>• Stimulus: `start`, `addr`, `data_in`, `wait(done)`.</a:t>
+            </a:r>
+          </a:p>
+          <a:p>
+            <a:pPr>
+              <a:lnSpc>
+                <a:spcPts val="2200"/>
+              </a:lnSpc>
+              <a:spcAft>
+                <a:spcPts val="1000"/>
+              </a:spcAft>
+              <a:defRPr sz="2000" b="0">
+                <a:solidFill>
+                  <a:srgbClr val="333333"/>
+                </a:solidFill>
+                <a:latin typeface="Calibri"/>
+              </a:defRPr>
+            </a:pPr>
+            <a:r>
+              <a:t>• Monitor/self-check: reconstruct address+W and data</a:t>
+            </a:r>
+          </a:p>
+          <a:p>
+            <a:pPr>
+              <a:lnSpc>
+                <a:spcPts val="2200"/>
+              </a:lnSpc>
+              <a:spcAft>
+                <a:spcPts val="1000"/>
+              </a:spcAft>
+              <a:defRPr sz="2000" b="0">
+                <a:solidFill>
+                  <a:srgbClr val="333333"/>
+                </a:solidFill>
+                <a:latin typeface="Calibri"/>
+              </a:defRPr>
+            </a:pPr>
+            <a:r>
+              <a:t>      from SCL/SDA; compare to expected.</a:t>
+            </a:r>
+          </a:p>
+        </p:txBody>
+      </p:sp>
+      <p:sp>
+        <p:nvSpPr>
+          <p:cNvPr id="4" name="TextBox 3"/>
+          <p:cNvSpPr txBox="1"/>
+          <p:nvPr/>
+        </p:nvSpPr>
+        <p:spPr>
+          <a:xfrm>
+            <a:off x="548640" y="6355080"/>
+            <a:ext cx="11064240" cy="320040"/>
+          </a:xfrm>
+          <a:prstGeom prst="rect">
+            <a:avLst/>
+          </a:prstGeom>
+          <a:noFill/>
+        </p:spPr>
+        <p:txBody>
+          <a:bodyPr wrap="square">
+            <a:noAutofit/>
+          </a:bodyPr>
+          <a:lstStyle/>
+          <a:p>
+            <a:pPr algn="r">
+              <a:lnSpc>
+                <a:spcPts val="2200"/>
+              </a:lnSpc>
+              <a:defRPr sz="1000" b="0">
+                <a:solidFill>
+                  <a:srgbClr val="666666"/>
+                </a:solidFill>
+                <a:latin typeface="Calibri"/>
+              </a:defRPr>
+            </a:pPr>
+            <a:r>
+              <a:t>learn_uart_spi_i2c / Module 7</a:t>
+            </a:r>
+          </a:p>
+        </p:txBody>
+      </p:sp>
+    </p:spTree>
+  </p:cSld>
+  <p:clrMapOvr>
+    <a:masterClrMapping/>
+  </p:clrMapOvr>
+</p:sld>
+</file>
+
+<file path=ppt/slides/slide22.xml><?xml version="1.0" encoding="utf-8"?>
+<p:sld xmlns:a="http://schemas.openxmlformats.org/drawingml/2006/main" xmlns:p="http://schemas.openxmlformats.org/presentationml/2006/main" xmlns:r="http://schemas.openxmlformats.org/officeDocument/2006/relationships">
+  <p:cSld>
+    <p:spTree>
+      <p:nvGrpSpPr>
+        <p:cNvPr id="1" name=""/>
+        <p:cNvGrpSpPr/>
+        <p:nvPr/>
+      </p:nvGrpSpPr>
+      <p:grpSpPr/>
+      <p:sp>
+        <p:nvSpPr>
+          <p:cNvPr id="2" name="TextBox 1"/>
+          <p:cNvSpPr txBox="1"/>
+          <p:nvPr/>
+        </p:nvSpPr>
+        <p:spPr>
+          <a:xfrm>
+            <a:off x="548640" y="2743200"/>
+            <a:ext cx="11064240" cy="1371600"/>
+          </a:xfrm>
+          <a:prstGeom prst="rect">
+            <a:avLst/>
+          </a:prstGeom>
+          <a:noFill/>
+        </p:spPr>
+        <p:txBody>
+          <a:bodyPr wrap="square">
+            <a:noAutofit/>
+          </a:bodyPr>
+          <a:lstStyle/>
+          <a:p>
+            <a:pPr algn="ctr">
+              <a:lnSpc>
+                <a:spcPts val="2200"/>
+              </a:lnSpc>
+              <a:defRPr sz="3600" b="1">
+                <a:solidFill>
+                  <a:srgbClr val="1A1A2E"/>
+                </a:solidFill>
+                <a:latin typeface="Calibri"/>
+              </a:defRPr>
+            </a:pPr>
+            <a:r>
+              <a:t>Hands-on examples</a:t>
+            </a:r>
+          </a:p>
+        </p:txBody>
+      </p:sp>
+      <p:sp>
+        <p:nvSpPr>
+          <p:cNvPr id="3" name="TextBox 2"/>
+          <p:cNvSpPr txBox="1"/>
+          <p:nvPr/>
+        </p:nvSpPr>
+        <p:spPr>
+          <a:xfrm>
+            <a:off x="548640" y="6355080"/>
+            <a:ext cx="11064240" cy="320040"/>
+          </a:xfrm>
+          <a:prstGeom prst="rect">
+            <a:avLst/>
+          </a:prstGeom>
+          <a:noFill/>
+        </p:spPr>
+        <p:txBody>
+          <a:bodyPr wrap="square">
+            <a:noAutofit/>
+          </a:bodyPr>
+          <a:lstStyle/>
+          <a:p>
+            <a:pPr algn="r">
+              <a:lnSpc>
+                <a:spcPts val="2200"/>
+              </a:lnSpc>
+              <a:defRPr sz="1000" b="0">
+                <a:solidFill>
+                  <a:srgbClr val="666666"/>
+                </a:solidFill>
+                <a:latin typeface="Calibri"/>
+              </a:defRPr>
+            </a:pPr>
+            <a:r>
+              <a:t>learn_uart_spi_i2c / Module 7</a:t>
+            </a:r>
+          </a:p>
+        </p:txBody>
+      </p:sp>
+    </p:spTree>
+  </p:cSld>
+  <p:clrMapOvr>
+    <a:masterClrMapping/>
+  </p:clrMapOvr>
+</p:sld>
+</file>
+
+<file path=ppt/slides/slide23.xml><?xml version="1.0" encoding="utf-8"?>
+<p:sld xmlns:a="http://schemas.openxmlformats.org/drawingml/2006/main" xmlns:p="http://schemas.openxmlformats.org/presentationml/2006/main" xmlns:r="http://schemas.openxmlformats.org/officeDocument/2006/relationships">
+  <p:cSld>
+    <p:spTree>
+      <p:nvGrpSpPr>
+        <p:cNvPr id="1" name=""/>
+        <p:cNvGrpSpPr/>
+        <p:nvPr/>
+      </p:nvGrpSpPr>
+      <p:grpSpPr/>
+      <p:sp>
+        <p:nvSpPr>
+          <p:cNvPr id="2" name="TextBox 1"/>
+          <p:cNvSpPr txBox="1"/>
+          <p:nvPr/>
+        </p:nvSpPr>
+        <p:spPr>
+          <a:xfrm>
+            <a:off x="548640" y="411480"/>
+            <a:ext cx="11064240" cy="777240"/>
+          </a:xfrm>
+          <a:prstGeom prst="rect">
+            <a:avLst/>
+          </a:prstGeom>
+          <a:noFill/>
+        </p:spPr>
+        <p:txBody>
+          <a:bodyPr wrap="square">
+            <a:noAutofit/>
+          </a:bodyPr>
+          <a:lstStyle/>
+          <a:p>
+            <a:pPr>
+              <a:lnSpc>
+                <a:spcPts val="2200"/>
+              </a:lnSpc>
+              <a:defRPr sz="2800" b="1">
+                <a:solidFill>
+                  <a:srgbClr val="1A1A2E"/>
+                </a:solidFill>
+                <a:latin typeface="Calibri"/>
+              </a:defRPr>
+            </a:pPr>
+            <a:r>
+              <a:t>Module 7 self-check</a:t>
+            </a:r>
+          </a:p>
+        </p:txBody>
+      </p:sp>
+      <p:sp>
+        <p:nvSpPr>
+          <p:cNvPr id="3" name="TextBox 2"/>
+          <p:cNvSpPr txBox="1"/>
+          <p:nvPr/>
+        </p:nvSpPr>
+        <p:spPr>
+          <a:xfrm>
+            <a:off x="548640" y="1051560"/>
+            <a:ext cx="11064240" cy="914400"/>
+          </a:xfrm>
+          <a:prstGeom prst="rect">
+            <a:avLst/>
+          </a:prstGeom>
+          <a:solidFill>
+            <a:srgbClr val="F4F4F4"/>
+          </a:solidFill>
+        </p:spPr>
+        <p:txBody>
+          <a:bodyPr wrap="square">
+            <a:noAutofit/>
+          </a:bodyPr>
+          <a:lstStyle/>
+          <a:p>
+            <a:pPr>
+              <a:lnSpc>
+                <a:spcPts val="2200"/>
+              </a:lnSpc>
+              <a:spcAft>
+                <a:spcPts val="200"/>
+              </a:spcAft>
+              <a:defRPr sz="2000" b="0">
+                <a:solidFill>
+                  <a:srgbClr val="333333"/>
+                </a:solidFill>
+                <a:latin typeface="Consolas"/>
+              </a:defRPr>
+            </a:pPr>
+            <a:r>
+              <a:t>$ ./scripts/module7.sh --help</a:t>
+            </a:r>
+          </a:p>
+        </p:txBody>
+      </p:sp>
+      <p:pic>
+        <p:nvPicPr>
+          <p:cNvPr id="4" name="Picture 3" descr="module7_check.png"/>
+          <p:cNvPicPr>
+            <a:picLocks noChangeAspect="1"/>
+          </p:cNvPicPr>
+          <p:nvPr/>
+        </p:nvPicPr>
+        <p:blipFill>
+          <a:blip r:embed="rId2"/>
+          <a:stretch>
+            <a:fillRect/>
+          </a:stretch>
+        </p:blipFill>
+        <p:spPr>
+          <a:xfrm>
+            <a:off x="548640" y="1965960"/>
+            <a:ext cx="7071358" cy="3977639"/>
+          </a:xfrm>
+          <a:prstGeom prst="rect">
+            <a:avLst/>
+          </a:prstGeom>
+        </p:spPr>
+      </p:pic>
+      <p:sp>
+        <p:nvSpPr>
+          <p:cNvPr id="5" name="TextBox 4"/>
+          <p:cNvSpPr txBox="1"/>
+          <p:nvPr/>
+        </p:nvSpPr>
+        <p:spPr>
+          <a:xfrm>
+            <a:off x="548640" y="6355080"/>
+            <a:ext cx="11064240" cy="320040"/>
+          </a:xfrm>
+          <a:prstGeom prst="rect">
+            <a:avLst/>
+          </a:prstGeom>
+          <a:noFill/>
+        </p:spPr>
+        <p:txBody>
+          <a:bodyPr wrap="square">
+            <a:noAutofit/>
+          </a:bodyPr>
+          <a:lstStyle/>
+          <a:p>
+            <a:pPr algn="r">
+              <a:lnSpc>
+                <a:spcPts val="2200"/>
+              </a:lnSpc>
+              <a:defRPr sz="1000" b="0">
+                <a:solidFill>
+                  <a:srgbClr val="666666"/>
+                </a:solidFill>
+                <a:latin typeface="Calibri"/>
+              </a:defRPr>
+            </a:pPr>
+            <a:r>
+              <a:t>learn_uart_spi_i2c / Module 7</a:t>
+            </a:r>
+          </a:p>
+        </p:txBody>
+      </p:sp>
+    </p:spTree>
+  </p:cSld>
+  <p:clrMapOvr>
+    <a:masterClrMapping/>
+  </p:clrMapOvr>
+</p:sld>
+</file>
+
+<file path=ppt/slides/slide24.xml><?xml version="1.0" encoding="utf-8"?>
+<p:sld xmlns:a="http://schemas.openxmlformats.org/drawingml/2006/main" xmlns:p="http://schemas.openxmlformats.org/presentationml/2006/main" xmlns:r="http://schemas.openxmlformats.org/officeDocument/2006/relationships">
+  <p:cSld>
+    <p:spTree>
+      <p:nvGrpSpPr>
+        <p:cNvPr id="1" name=""/>
+        <p:cNvGrpSpPr/>
+        <p:nvPr/>
+      </p:nvGrpSpPr>
+      <p:grpSpPr/>
+      <p:sp>
+        <p:nvSpPr>
+          <p:cNvPr id="2" name="TextBox 1"/>
+          <p:cNvSpPr txBox="1"/>
+          <p:nvPr/>
+        </p:nvSpPr>
+        <p:spPr>
+          <a:xfrm>
+            <a:off x="548640" y="411480"/>
+            <a:ext cx="11064240" cy="777240"/>
+          </a:xfrm>
+          <a:prstGeom prst="rect">
+            <a:avLst/>
+          </a:prstGeom>
+          <a:noFill/>
+        </p:spPr>
+        <p:txBody>
+          <a:bodyPr wrap="square">
+            <a:noAutofit/>
+          </a:bodyPr>
+          <a:lstStyle/>
+          <a:p>
+            <a:pPr>
+              <a:lnSpc>
+                <a:spcPts val="2200"/>
+              </a:lnSpc>
+              <a:defRPr sz="2800" b="1">
+                <a:solidFill>
+                  <a:srgbClr val="1A1A2E"/>
+                </a:solidFill>
+                <a:latin typeface="Calibri"/>
+              </a:defRPr>
+            </a:pPr>
+            <a:r>
+              <a:t>Example 1: I²C baseline</a:t>
+            </a:r>
+          </a:p>
+        </p:txBody>
+      </p:sp>
+      <p:sp>
+        <p:nvSpPr>
+          <p:cNvPr id="3" name="TextBox 2"/>
+          <p:cNvSpPr txBox="1"/>
+          <p:nvPr/>
+        </p:nvSpPr>
+        <p:spPr>
+          <a:xfrm>
+            <a:off x="548640" y="1234440"/>
+            <a:ext cx="11064240" cy="4937760"/>
+          </a:xfrm>
+          <a:prstGeom prst="rect">
+            <a:avLst/>
+          </a:prstGeom>
+          <a:noFill/>
+        </p:spPr>
+        <p:txBody>
+          <a:bodyPr wrap="square">
+            <a:noAutofit/>
+          </a:bodyPr>
+          <a:lstStyle/>
+          <a:p>
+            <a:pPr>
+              <a:lnSpc>
+                <a:spcPts val="2200"/>
+              </a:lnSpc>
+              <a:spcAft>
+                <a:spcPts val="1000"/>
+              </a:spcAft>
+              <a:defRPr sz="2000" b="0">
+                <a:solidFill>
+                  <a:srgbClr val="333333"/>
+                </a:solidFill>
+                <a:latin typeface="Calibri"/>
+              </a:defRPr>
+            </a:pPr>
+            <a:r>
+              <a:t>• Drives a single write transaction (START → address+W</a:t>
+            </a:r>
+          </a:p>
+          <a:p>
+            <a:pPr>
+              <a:lnSpc>
+                <a:spcPts val="2200"/>
+              </a:lnSpc>
+              <a:spcAft>
+                <a:spcPts val="1000"/>
+              </a:spcAft>
+              <a:defRPr sz="2000" b="0">
+                <a:solidFill>
+                  <a:srgbClr val="333333"/>
+                </a:solidFill>
+                <a:latin typeface="Calibri"/>
+              </a:defRPr>
+            </a:pPr>
+            <a:r>
+              <a:t>      → data → STOP)</a:t>
+            </a:r>
+          </a:p>
+          <a:p>
+            <a:pPr>
+              <a:lnSpc>
+                <a:spcPts val="2200"/>
+              </a:lnSpc>
+              <a:spcAft>
+                <a:spcPts val="1000"/>
+              </a:spcAft>
+              <a:defRPr sz="2000" b="0">
+                <a:solidFill>
+                  <a:srgbClr val="333333"/>
+                </a:solidFill>
+                <a:latin typeface="Calibri"/>
+              </a:defRPr>
+            </a:pPr>
+            <a:r>
+              <a:t>• Includes a simple bus monitor that samples SDA on</a:t>
+            </a:r>
+          </a:p>
+          <a:p>
+            <a:pPr>
+              <a:lnSpc>
+                <a:spcPts val="2200"/>
+              </a:lnSpc>
+              <a:spcAft>
+                <a:spcPts val="1000"/>
+              </a:spcAft>
+              <a:defRPr sz="2000" b="0">
+                <a:solidFill>
+                  <a:srgbClr val="333333"/>
+                </a:solidFill>
+                <a:latin typeface="Calibri"/>
+              </a:defRPr>
+            </a:pPr>
+            <a:r>
+              <a:t>      SCL rising edges to reconstruct bytes</a:t>
+            </a:r>
+          </a:p>
+          <a:p>
+            <a:pPr>
+              <a:lnSpc>
+                <a:spcPts val="2200"/>
+              </a:lnSpc>
+              <a:spcAft>
+                <a:spcPts val="1000"/>
+              </a:spcAft>
+              <a:defRPr sz="2000" b="0">
+                <a:solidFill>
+                  <a:srgbClr val="333333"/>
+                </a:solidFill>
+                <a:latin typeface="Calibri"/>
+              </a:defRPr>
+            </a:pPr>
+            <a:r>
+              <a:t>• No UVM</a:t>
+            </a:r>
+          </a:p>
+        </p:txBody>
+      </p:sp>
+      <p:sp>
+        <p:nvSpPr>
+          <p:cNvPr id="4" name="TextBox 3"/>
+          <p:cNvSpPr txBox="1"/>
+          <p:nvPr/>
+        </p:nvSpPr>
+        <p:spPr>
+          <a:xfrm>
+            <a:off x="548640" y="6355080"/>
+            <a:ext cx="11064240" cy="320040"/>
+          </a:xfrm>
+          <a:prstGeom prst="rect">
+            <a:avLst/>
+          </a:prstGeom>
+          <a:noFill/>
+        </p:spPr>
+        <p:txBody>
+          <a:bodyPr wrap="square">
+            <a:noAutofit/>
+          </a:bodyPr>
+          <a:lstStyle/>
+          <a:p>
+            <a:pPr algn="r">
+              <a:lnSpc>
+                <a:spcPts val="2200"/>
+              </a:lnSpc>
+              <a:defRPr sz="1000" b="0">
+                <a:solidFill>
+                  <a:srgbClr val="666666"/>
+                </a:solidFill>
+                <a:latin typeface="Calibri"/>
+              </a:defRPr>
+            </a:pPr>
+            <a:r>
+              <a:t>learn_uart_spi_i2c / Module 7</a:t>
+            </a:r>
+          </a:p>
+        </p:txBody>
+      </p:sp>
+    </p:spTree>
+  </p:cSld>
+  <p:clrMapOvr>
+    <a:masterClrMapping/>
+  </p:clrMapOvr>
+</p:sld>
+</file>
+
+<file path=ppt/slides/slide25.xml><?xml version="1.0" encoding="utf-8"?>
+<p:sld xmlns:a="http://schemas.openxmlformats.org/drawingml/2006/main" xmlns:p="http://schemas.openxmlformats.org/presentationml/2006/main" xmlns:r="http://schemas.openxmlformats.org/officeDocument/2006/relationships">
+  <p:cSld>
+    <p:spTree>
+      <p:nvGrpSpPr>
+        <p:cNvPr id="1" name=""/>
+        <p:cNvGrpSpPr/>
+        <p:nvPr/>
+      </p:nvGrpSpPr>
+      <p:grpSpPr/>
+      <p:sp>
+        <p:nvSpPr>
+          <p:cNvPr id="2" name="TextBox 1"/>
+          <p:cNvSpPr txBox="1"/>
+          <p:nvPr/>
+        </p:nvSpPr>
+        <p:spPr>
+          <a:xfrm>
+            <a:off x="548640" y="411480"/>
+            <a:ext cx="11064240" cy="777240"/>
+          </a:xfrm>
+          <a:prstGeom prst="rect">
+            <a:avLst/>
+          </a:prstGeom>
+          <a:noFill/>
+        </p:spPr>
+        <p:txBody>
+          <a:bodyPr wrap="square">
+            <a:noAutofit/>
+          </a:bodyPr>
+          <a:lstStyle/>
+          <a:p>
+            <a:pPr>
+              <a:lnSpc>
+                <a:spcPts val="2200"/>
+              </a:lnSpc>
+              <a:defRPr sz="2800" b="1">
+                <a:solidFill>
+                  <a:srgbClr val="1A1A2E"/>
+                </a:solidFill>
+                <a:latin typeface="Calibri"/>
+              </a:defRPr>
+            </a:pPr>
+            <a:r>
+              <a:t>Demo: I²C baseline</a:t>
+            </a:r>
+          </a:p>
+        </p:txBody>
+      </p:sp>
+      <p:sp>
+        <p:nvSpPr>
+          <p:cNvPr id="3" name="TextBox 2"/>
+          <p:cNvSpPr txBox="1"/>
+          <p:nvPr/>
+        </p:nvSpPr>
+        <p:spPr>
+          <a:xfrm>
+            <a:off x="548640" y="1051560"/>
+            <a:ext cx="11064240" cy="914400"/>
+          </a:xfrm>
+          <a:prstGeom prst="rect">
+            <a:avLst/>
+          </a:prstGeom>
+          <a:solidFill>
+            <a:srgbClr val="F4F4F4"/>
+          </a:solidFill>
+        </p:spPr>
+        <p:txBody>
+          <a:bodyPr wrap="square">
+            <a:noAutofit/>
+          </a:bodyPr>
+          <a:lstStyle/>
+          <a:p>
+            <a:pPr>
+              <a:lnSpc>
+                <a:spcPts val="2200"/>
+              </a:lnSpc>
+              <a:spcAft>
+                <a:spcPts val="200"/>
+              </a:spcAft>
+              <a:defRPr sz="2000" b="0">
+                <a:solidFill>
+                  <a:srgbClr val="333333"/>
+                </a:solidFill>
+                <a:latin typeface="Consolas"/>
+              </a:defRPr>
+            </a:pPr>
+            <a:r>
+              <a:t>$ ./scripts/module7.sh --run</a:t>
+            </a:r>
+          </a:p>
+        </p:txBody>
+      </p:sp>
+      <p:pic>
+        <p:nvPicPr>
+          <p:cNvPr id="4" name="Picture 3" descr="i2c_baseline.png"/>
+          <p:cNvPicPr>
+            <a:picLocks noChangeAspect="1"/>
+          </p:cNvPicPr>
+          <p:nvPr/>
+        </p:nvPicPr>
+        <p:blipFill>
+          <a:blip r:embed="rId2"/>
+          <a:stretch>
+            <a:fillRect/>
+          </a:stretch>
+        </p:blipFill>
+        <p:spPr>
+          <a:xfrm>
+            <a:off x="548640" y="1965960"/>
+            <a:ext cx="7071358" cy="3977639"/>
+          </a:xfrm>
+          <a:prstGeom prst="rect">
+            <a:avLst/>
+          </a:prstGeom>
+        </p:spPr>
+      </p:pic>
+      <p:sp>
+        <p:nvSpPr>
+          <p:cNvPr id="5" name="TextBox 4"/>
+          <p:cNvSpPr txBox="1"/>
+          <p:nvPr/>
+        </p:nvSpPr>
+        <p:spPr>
+          <a:xfrm>
+            <a:off x="548640" y="6355080"/>
+            <a:ext cx="11064240" cy="320040"/>
+          </a:xfrm>
+          <a:prstGeom prst="rect">
+            <a:avLst/>
+          </a:prstGeom>
+          <a:noFill/>
+        </p:spPr>
+        <p:txBody>
+          <a:bodyPr wrap="square">
+            <a:noAutofit/>
+          </a:bodyPr>
+          <a:lstStyle/>
+          <a:p>
+            <a:pPr algn="r">
+              <a:lnSpc>
+                <a:spcPts val="2200"/>
+              </a:lnSpc>
+              <a:defRPr sz="1000" b="0">
+                <a:solidFill>
+                  <a:srgbClr val="666666"/>
+                </a:solidFill>
+                <a:latin typeface="Calibri"/>
+              </a:defRPr>
+            </a:pPr>
+            <a:r>
+              <a:t>learn_uart_spi_i2c / Module 7</a:t>
+            </a:r>
+          </a:p>
+        </p:txBody>
+      </p:sp>
+    </p:spTree>
+  </p:cSld>
+  <p:clrMapOvr>
+    <a:masterClrMapping/>
+  </p:clrMapOvr>
+</p:sld>
+</file>
+
+<file path=ppt/slides/slide26.xml><?xml version="1.0" encoding="utf-8"?>
+<p:sld xmlns:a="http://schemas.openxmlformats.org/drawingml/2006/main" xmlns:p="http://schemas.openxmlformats.org/presentationml/2006/main" xmlns:r="http://schemas.openxmlformats.org/officeDocument/2006/relationships">
+  <p:cSld>
+    <p:spTree>
+      <p:nvGrpSpPr>
+        <p:cNvPr id="1" name=""/>
+        <p:cNvGrpSpPr/>
+        <p:nvPr/>
+      </p:nvGrpSpPr>
+      <p:grpSpPr/>
+      <p:sp>
+        <p:nvSpPr>
+          <p:cNvPr id="2" name="TextBox 1"/>
+          <p:cNvSpPr txBox="1"/>
+          <p:nvPr/>
+        </p:nvSpPr>
+        <p:spPr>
+          <a:xfrm>
+            <a:off x="548640" y="2743200"/>
+            <a:ext cx="11064240" cy="1371600"/>
+          </a:xfrm>
+          <a:prstGeom prst="rect">
+            <a:avLst/>
+          </a:prstGeom>
+          <a:noFill/>
+        </p:spPr>
+        <p:txBody>
+          <a:bodyPr wrap="square">
+            <a:noAutofit/>
+          </a:bodyPr>
+          <a:lstStyle/>
+          <a:p>
+            <a:pPr algn="ctr">
+              <a:lnSpc>
+                <a:spcPts val="2200"/>
+              </a:lnSpc>
+              <a:defRPr sz="3600" b="1">
+                <a:solidFill>
+                  <a:srgbClr val="1A1A2E"/>
+                </a:solidFill>
+                <a:latin typeface="Calibri"/>
+              </a:defRPr>
+            </a:pPr>
+            <a:r>
+              <a:t>Practice &amp; assessment</a:t>
+            </a:r>
+          </a:p>
+        </p:txBody>
+      </p:sp>
+      <p:sp>
+        <p:nvSpPr>
+          <p:cNvPr id="3" name="TextBox 2"/>
+          <p:cNvSpPr txBox="1"/>
+          <p:nvPr/>
+        </p:nvSpPr>
+        <p:spPr>
+          <a:xfrm>
+            <a:off x="548640" y="6355080"/>
+            <a:ext cx="11064240" cy="320040"/>
+          </a:xfrm>
+          <a:prstGeom prst="rect">
+            <a:avLst/>
+          </a:prstGeom>
+          <a:noFill/>
+        </p:spPr>
+        <p:txBody>
+          <a:bodyPr wrap="square">
+            <a:noAutofit/>
+          </a:bodyPr>
+          <a:lstStyle/>
+          <a:p>
+            <a:pPr algn="r">
+              <a:lnSpc>
+                <a:spcPts val="2200"/>
+              </a:lnSpc>
+              <a:defRPr sz="1000" b="0">
+                <a:solidFill>
+                  <a:srgbClr val="666666"/>
+                </a:solidFill>
+                <a:latin typeface="Calibri"/>
+              </a:defRPr>
+            </a:pPr>
+            <a:r>
+              <a:t>learn_uart_spi_i2c / Module 7</a:t>
+            </a:r>
+          </a:p>
+        </p:txBody>
+      </p:sp>
+    </p:spTree>
+  </p:cSld>
+  <p:clrMapOvr>
+    <a:masterClrMapping/>
+  </p:clrMapOvr>
+</p:sld>
+</file>
+
+<file path=ppt/slides/slide27.xml><?xml version="1.0" encoding="utf-8"?>
+<p:sld xmlns:a="http://schemas.openxmlformats.org/drawingml/2006/main" xmlns:p="http://schemas.openxmlformats.org/presentationml/2006/main" xmlns:r="http://schemas.openxmlformats.org/officeDocument/2006/relationships">
+  <p:cSld>
+    <p:spTree>
+      <p:nvGrpSpPr>
+        <p:cNvPr id="1" name=""/>
+        <p:cNvGrpSpPr/>
+        <p:nvPr/>
+      </p:nvGrpSpPr>
+      <p:grpSpPr/>
+      <p:sp>
+        <p:nvSpPr>
+          <p:cNvPr id="2" name="TextBox 1"/>
+          <p:cNvSpPr txBox="1"/>
+          <p:nvPr/>
+        </p:nvSpPr>
+        <p:spPr>
+          <a:xfrm>
+            <a:off x="548640" y="411480"/>
+            <a:ext cx="11064240" cy="777240"/>
+          </a:xfrm>
+          <a:prstGeom prst="rect">
+            <a:avLst/>
+          </a:prstGeom>
+          <a:noFill/>
+        </p:spPr>
+        <p:txBody>
+          <a:bodyPr wrap="square">
+            <a:noAutofit/>
+          </a:bodyPr>
+          <a:lstStyle/>
+          <a:p>
+            <a:pPr>
+              <a:lnSpc>
+                <a:spcPts val="2200"/>
+              </a:lnSpc>
+              <a:defRPr sz="2800" b="1">
+                <a:solidFill>
+                  <a:srgbClr val="1A1A2E"/>
+                </a:solidFill>
+                <a:latin typeface="Calibri"/>
+              </a:defRPr>
+            </a:pPr>
+            <a:r>
+              <a:t>Exercises</a:t>
+            </a:r>
+          </a:p>
+        </p:txBody>
+      </p:sp>
+      <p:sp>
+        <p:nvSpPr>
+          <p:cNvPr id="3" name="TextBox 2"/>
+          <p:cNvSpPr txBox="1"/>
+          <p:nvPr/>
+        </p:nvSpPr>
+        <p:spPr>
+          <a:xfrm>
+            <a:off x="548640" y="1234440"/>
+            <a:ext cx="11064240" cy="4937760"/>
+          </a:xfrm>
+          <a:prstGeom prst="rect">
+            <a:avLst/>
+          </a:prstGeom>
+          <a:noFill/>
+        </p:spPr>
+        <p:txBody>
+          <a:bodyPr wrap="square">
+            <a:noAutofit/>
+          </a:bodyPr>
+          <a:lstStyle/>
+          <a:p>
+            <a:pPr>
+              <a:lnSpc>
+                <a:spcPts val="2200"/>
+              </a:lnSpc>
+              <a:spcAft>
+                <a:spcPts val="1000"/>
+              </a:spcAft>
+              <a:defRPr sz="2000" b="0">
+                <a:solidFill>
+                  <a:srgbClr val="333333"/>
+                </a:solidFill>
+                <a:latin typeface="Calibri"/>
+              </a:defRPr>
+            </a:pPr>
+            <a:r>
+              <a:t>• Run i2c_baseline</a:t>
+            </a:r>
+          </a:p>
+          <a:p>
+            <a:pPr>
+              <a:lnSpc>
+                <a:spcPts val="2200"/>
+              </a:lnSpc>
+              <a:spcAft>
+                <a:spcPts val="1000"/>
+              </a:spcAft>
+              <a:defRPr sz="2000" b="0">
+                <a:solidFill>
+                  <a:srgbClr val="333333"/>
+                </a:solidFill>
+                <a:latin typeface="Calibri"/>
+              </a:defRPr>
+            </a:pPr>
+            <a:r>
+              <a:t>• Trace one transfer</a:t>
+            </a:r>
+          </a:p>
+          <a:p>
+            <a:pPr>
+              <a:lnSpc>
+                <a:spcPts val="2200"/>
+              </a:lnSpc>
+              <a:spcAft>
+                <a:spcPts val="1000"/>
+              </a:spcAft>
+              <a:defRPr sz="2000" b="0">
+                <a:solidFill>
+                  <a:srgbClr val="333333"/>
+                </a:solidFill>
+                <a:latin typeface="Calibri"/>
+              </a:defRPr>
+            </a:pPr>
+            <a:r>
+              <a:t>• Bus monitor</a:t>
+            </a:r>
+          </a:p>
+          <a:p>
+            <a:pPr>
+              <a:lnSpc>
+                <a:spcPts val="2200"/>
+              </a:lnSpc>
+              <a:spcAft>
+                <a:spcPts val="1000"/>
+              </a:spcAft>
+              <a:defRPr sz="2000" b="0">
+                <a:solidFill>
+                  <a:srgbClr val="333333"/>
+                </a:solidFill>
+                <a:latin typeface="Calibri"/>
+              </a:defRPr>
+            </a:pPr>
+            <a:r>
+              <a:t>• Optional: Waveforms</a:t>
+            </a:r>
+          </a:p>
+        </p:txBody>
+      </p:sp>
+      <p:sp>
+        <p:nvSpPr>
+          <p:cNvPr id="4" name="TextBox 3"/>
+          <p:cNvSpPr txBox="1"/>
+          <p:nvPr/>
+        </p:nvSpPr>
+        <p:spPr>
+          <a:xfrm>
+            <a:off x="548640" y="6355080"/>
+            <a:ext cx="11064240" cy="320040"/>
+          </a:xfrm>
+          <a:prstGeom prst="rect">
+            <a:avLst/>
+          </a:prstGeom>
+          <a:noFill/>
+        </p:spPr>
+        <p:txBody>
+          <a:bodyPr wrap="square">
+            <a:noAutofit/>
+          </a:bodyPr>
+          <a:lstStyle/>
+          <a:p>
+            <a:pPr algn="r">
+              <a:lnSpc>
+                <a:spcPts val="2200"/>
+              </a:lnSpc>
+              <a:defRPr sz="1000" b="0">
+                <a:solidFill>
+                  <a:srgbClr val="666666"/>
+                </a:solidFill>
+                <a:latin typeface="Calibri"/>
+              </a:defRPr>
+            </a:pPr>
+            <a:r>
+              <a:t>learn_uart_spi_i2c / Module 7</a:t>
+            </a:r>
+          </a:p>
+        </p:txBody>
+      </p:sp>
+    </p:spTree>
+  </p:cSld>
+  <p:clrMapOvr>
+    <a:masterClrMapping/>
+  </p:clrMapOvr>
+</p:sld>
+</file>
+
+<file path=ppt/slides/slide28.xml><?xml version="1.0" encoding="utf-8"?>
+<p:sld xmlns:a="http://schemas.openxmlformats.org/drawingml/2006/main" xmlns:p="http://schemas.openxmlformats.org/presentationml/2006/main" xmlns:r="http://schemas.openxmlformats.org/officeDocument/2006/relationships">
+  <p:cSld>
+    <p:spTree>
+      <p:nvGrpSpPr>
+        <p:cNvPr id="1" name=""/>
+        <p:cNvGrpSpPr/>
+        <p:nvPr/>
+      </p:nvGrpSpPr>
+      <p:grpSpPr/>
+      <p:sp>
+        <p:nvSpPr>
+          <p:cNvPr id="2" name="TextBox 1"/>
+          <p:cNvSpPr txBox="1"/>
+          <p:nvPr/>
+        </p:nvSpPr>
+        <p:spPr>
+          <a:xfrm>
+            <a:off x="548640" y="411480"/>
+            <a:ext cx="11064240" cy="777240"/>
+          </a:xfrm>
+          <a:prstGeom prst="rect">
+            <a:avLst/>
+          </a:prstGeom>
+          <a:noFill/>
+        </p:spPr>
+        <p:txBody>
+          <a:bodyPr wrap="square">
+            <a:noAutofit/>
+          </a:bodyPr>
+          <a:lstStyle/>
+          <a:p>
+            <a:pPr>
+              <a:lnSpc>
+                <a:spcPts val="2200"/>
+              </a:lnSpc>
+              <a:defRPr sz="2800" b="1">
+                <a:solidFill>
+                  <a:srgbClr val="1A1A2E"/>
+                </a:solidFill>
+                <a:latin typeface="Calibri"/>
+              </a:defRPr>
+            </a:pPr>
+            <a:r>
+              <a:t>Assessment checklist</a:t>
+            </a:r>
+          </a:p>
+        </p:txBody>
+      </p:sp>
+      <p:sp>
+        <p:nvSpPr>
+          <p:cNvPr id="3" name="TextBox 2"/>
+          <p:cNvSpPr txBox="1"/>
+          <p:nvPr/>
+        </p:nvSpPr>
+        <p:spPr>
+          <a:xfrm>
+            <a:off x="548640" y="1234440"/>
+            <a:ext cx="11064240" cy="4937760"/>
+          </a:xfrm>
+          <a:prstGeom prst="rect">
+            <a:avLst/>
+          </a:prstGeom>
+          <a:noFill/>
+        </p:spPr>
+        <p:txBody>
+          <a:bodyPr wrap="square">
+            <a:noAutofit/>
+          </a:bodyPr>
+          <a:lstStyle/>
+          <a:p>
+            <a:pPr>
+              <a:lnSpc>
+                <a:spcPts val="2200"/>
+              </a:lnSpc>
+              <a:spcAft>
+                <a:spcPts val="1000"/>
+              </a:spcAft>
+              <a:defRPr sz="2000" b="0">
+                <a:solidFill>
+                  <a:srgbClr val="333333"/>
+                </a:solidFill>
+                <a:latin typeface="Calibri"/>
+              </a:defRPr>
+            </a:pPr>
+            <a:r>
+              <a:t>• Can describe I²C START, STOP, address+R/W, and data</a:t>
+            </a:r>
+          </a:p>
+          <a:p>
+            <a:pPr>
+              <a:lnSpc>
+                <a:spcPts val="2200"/>
+              </a:lnSpc>
+              <a:spcAft>
+                <a:spcPts val="1000"/>
+              </a:spcAft>
+              <a:defRPr sz="2000" b="0">
+                <a:solidFill>
+                  <a:srgbClr val="333333"/>
+                </a:solidFill>
+                <a:latin typeface="Calibri"/>
+              </a:defRPr>
+            </a:pPr>
+            <a:r>
+              <a:t>      phase (and ACK/NACK concept).</a:t>
+            </a:r>
+          </a:p>
+          <a:p>
+            <a:pPr>
+              <a:lnSpc>
+                <a:spcPts val="2200"/>
+              </a:lnSpc>
+              <a:spcAft>
+                <a:spcPts val="1000"/>
+              </a:spcAft>
+              <a:defRPr sz="2000" b="0">
+                <a:solidFill>
+                  <a:srgbClr val="333333"/>
+                </a:solidFill>
+                <a:latin typeface="Calibri"/>
+              </a:defRPr>
+            </a:pPr>
+            <a:r>
+              <a:t>• Can explain the role of i2c_master and clk_div; know</a:t>
+            </a:r>
+          </a:p>
+          <a:p>
+            <a:pPr>
+              <a:lnSpc>
+                <a:spcPts val="2200"/>
+              </a:lnSpc>
+              <a:spcAft>
+                <a:spcPts val="1000"/>
+              </a:spcAft>
+              <a:defRPr sz="2000" b="0">
+                <a:solidFill>
+                  <a:srgbClr val="333333"/>
+                </a:solidFill>
+                <a:latin typeface="Calibri"/>
+              </a:defRPr>
+            </a:pPr>
+            <a:r>
+              <a:t>      the baseline uses push-pull (simplified).</a:t>
+            </a:r>
+          </a:p>
+          <a:p>
+            <a:pPr>
+              <a:lnSpc>
+                <a:spcPts val="2200"/>
+              </a:lnSpc>
+              <a:spcAft>
+                <a:spcPts val="1000"/>
+              </a:spcAft>
+              <a:defRPr sz="2000" b="0">
+                <a:solidFill>
+                  <a:srgbClr val="333333"/>
+                </a:solidFill>
+                <a:latin typeface="Calibri"/>
+              </a:defRPr>
+            </a:pPr>
+            <a:r>
+              <a:t>• Can run i2c_baseline and interpret the test result.</a:t>
+            </a:r>
+          </a:p>
+          <a:p>
+            <a:pPr>
+              <a:lnSpc>
+                <a:spcPts val="2200"/>
+              </a:lnSpc>
+              <a:spcAft>
+                <a:spcPts val="1000"/>
+              </a:spcAft>
+              <a:defRPr sz="2000" b="0">
+                <a:solidFill>
+                  <a:srgbClr val="333333"/>
+                </a:solidFill>
+                <a:latin typeface="Calibri"/>
+              </a:defRPr>
+            </a:pPr>
+            <a:r>
+              <a:t>• Ready for Module 8: I²C UVM+SV verification.</a:t>
+            </a:r>
+          </a:p>
+        </p:txBody>
+      </p:sp>
+      <p:sp>
+        <p:nvSpPr>
+          <p:cNvPr id="4" name="TextBox 3"/>
+          <p:cNvSpPr txBox="1"/>
+          <p:nvPr/>
+        </p:nvSpPr>
+        <p:spPr>
+          <a:xfrm>
+            <a:off x="548640" y="6355080"/>
+            <a:ext cx="11064240" cy="320040"/>
+          </a:xfrm>
+          <a:prstGeom prst="rect">
+            <a:avLst/>
+          </a:prstGeom>
+          <a:noFill/>
+        </p:spPr>
+        <p:txBody>
+          <a:bodyPr wrap="square">
+            <a:noAutofit/>
+          </a:bodyPr>
+          <a:lstStyle/>
+          <a:p>
+            <a:pPr algn="r">
+              <a:lnSpc>
+                <a:spcPts val="2200"/>
+              </a:lnSpc>
+              <a:defRPr sz="1000" b="0">
+                <a:solidFill>
+                  <a:srgbClr val="666666"/>
+                </a:solidFill>
+                <a:latin typeface="Calibri"/>
+              </a:defRPr>
+            </a:pPr>
+            <a:r>
+              <a:t>learn_uart_spi_i2c / Module 7</a:t>
+            </a:r>
+          </a:p>
+        </p:txBody>
+      </p:sp>
+    </p:spTree>
+  </p:cSld>
+  <p:clrMapOvr>
+    <a:masterClrMapping/>
+  </p:clrMapOvr>
+</p:sld>
+</file>
+
+<file path=ppt/slides/slide29.xml><?xml version="1.0" encoding="utf-8"?>
+<p:sld xmlns:a="http://schemas.openxmlformats.org/drawingml/2006/main" xmlns:p="http://schemas.openxmlformats.org/presentationml/2006/main" xmlns:r="http://schemas.openxmlformats.org/officeDocument/2006/relationships">
+  <p:cSld>
+    <p:spTree>
+      <p:nvGrpSpPr>
+        <p:cNvPr id="1" name=""/>
+        <p:cNvGrpSpPr/>
+        <p:nvPr/>
+      </p:nvGrpSpPr>
+      <p:grpSpPr/>
+      <p:sp>
+        <p:nvSpPr>
+          <p:cNvPr id="2" name="TextBox 1"/>
+          <p:cNvSpPr txBox="1"/>
+          <p:nvPr/>
+        </p:nvSpPr>
+        <p:spPr>
+          <a:xfrm>
+            <a:off x="548640" y="411480"/>
+            <a:ext cx="11064240" cy="777240"/>
+          </a:xfrm>
+          <a:prstGeom prst="rect">
+            <a:avLst/>
+          </a:prstGeom>
+          <a:noFill/>
+        </p:spPr>
+        <p:txBody>
+          <a:bodyPr wrap="square">
+            <a:noAutofit/>
+          </a:bodyPr>
+          <a:lstStyle/>
+          <a:p>
+            <a:pPr>
+              <a:lnSpc>
+                <a:spcPts val="2200"/>
+              </a:lnSpc>
+              <a:defRPr sz="2800" b="1">
+                <a:solidFill>
+                  <a:srgbClr val="1A1A2E"/>
+                </a:solidFill>
+                <a:latin typeface="Calibri"/>
+              </a:defRPr>
+            </a:pPr>
+            <a:r>
+              <a:t>Summary &amp; next steps</a:t>
+            </a:r>
+          </a:p>
+        </p:txBody>
+      </p:sp>
+      <p:sp>
+        <p:nvSpPr>
+          <p:cNvPr id="3" name="TextBox 2"/>
+          <p:cNvSpPr txBox="1"/>
+          <p:nvPr/>
+        </p:nvSpPr>
+        <p:spPr>
+          <a:xfrm>
+            <a:off x="548640" y="1234440"/>
+            <a:ext cx="11064240" cy="4937760"/>
+          </a:xfrm>
+          <a:prstGeom prst="rect">
+            <a:avLst/>
+          </a:prstGeom>
+          <a:noFill/>
+        </p:spPr>
+        <p:txBody>
+          <a:bodyPr wrap="square">
+            <a:noAutofit/>
+          </a:bodyPr>
+          <a:lstStyle/>
+          <a:p>
+            <a:pPr>
+              <a:lnSpc>
+                <a:spcPts val="2200"/>
+              </a:lnSpc>
+              <a:spcAft>
+                <a:spcPts val="1000"/>
+              </a:spcAft>
+              <a:defRPr sz="2000" b="0">
+                <a:solidFill>
+                  <a:srgbClr val="333333"/>
+                </a:solidFill>
+                <a:latin typeface="Calibri"/>
+              </a:defRPr>
+            </a:pPr>
+            <a:r>
+              <a:t>• Understand the I²C protocol (start/stop, addressing,</a:t>
+            </a:r>
+          </a:p>
+          <a:p>
+            <a:pPr>
+              <a:lnSpc>
+                <a:spcPts val="2200"/>
+              </a:lnSpc>
+              <a:spcAft>
+                <a:spcPts val="1000"/>
+              </a:spcAft>
+              <a:defRPr sz="2000" b="0">
+                <a:solidFill>
+                  <a:srgbClr val="333333"/>
+                </a:solidFill>
+                <a:latin typeface="Calibri"/>
+              </a:defRPr>
+            </a:pPr>
+            <a:r>
+              <a:t>      ACK/NACK), translate it to RTL (simple master…</a:t>
+            </a:r>
+          </a:p>
+          <a:p>
+            <a:pPr>
+              <a:lnSpc>
+                <a:spcPts val="2200"/>
+              </a:lnSpc>
+              <a:spcAft>
+                <a:spcPts val="1000"/>
+              </a:spcAft>
+              <a:defRPr sz="2000" b="0">
+                <a:solidFill>
+                  <a:srgbClr val="333333"/>
+                </a:solidFill>
+                <a:latin typeface="Calibri"/>
+              </a:defRPr>
+            </a:pPr>
+            <a:r>
+              <a:t>• Complete module7/CHECKLIST.md</a:t>
+            </a:r>
+          </a:p>
+          <a:p>
+            <a:pPr>
+              <a:lnSpc>
+                <a:spcPts val="2200"/>
+              </a:lnSpc>
+              <a:spcAft>
+                <a:spcPts val="1000"/>
+              </a:spcAft>
+              <a:defRPr sz="2000" b="0">
+                <a:solidFill>
+                  <a:srgbClr val="333333"/>
+                </a:solidFill>
+                <a:latin typeface="Calibri"/>
+              </a:defRPr>
+            </a:pPr>
+            <a:r>
+              <a:t>• Review module7/EXAMPLES.md and run each lab</a:t>
+            </a:r>
+          </a:p>
+          <a:p>
+            <a:pPr>
+              <a:lnSpc>
+                <a:spcPts val="2200"/>
+              </a:lnSpc>
+              <a:spcAft>
+                <a:spcPts val="1000"/>
+              </a:spcAft>
+              <a:defRPr sz="2000" b="0">
+                <a:solidFill>
+                  <a:srgbClr val="333333"/>
+                </a:solidFill>
+                <a:latin typeface="Calibri"/>
+              </a:defRPr>
+            </a:pPr>
+            <a:r>
+              <a:t>• Next: I²C UVM+SV</a:t>
             </a:r>
           </a:p>
         </p:txBody>
@@ -6127,7 +8515,7 @@
               </a:defRPr>
             </a:pPr>
             <a:r>
-              <a:t>Syllabus topics</a:t>
+              <a:t>How to learn this module</a:t>
             </a:r>
           </a:p>
         </p:txBody>
@@ -6223,7 +8611,7 @@
               </a:defRPr>
             </a:pPr>
             <a:r>
-              <a:t>1. I²C Protocol Essentials</a:t>
+              <a:t>Suggested learning path</a:t>
             </a:r>
           </a:p>
         </p:txBody>
@@ -6265,7 +8653,7 @@
               </a:defRPr>
             </a:pPr>
             <a:r>
-              <a:t>• Bus idle: SCL=1, SDA=1.</a:t>
+              <a:t>• Read the detailed I²C learning guide:</a:t>
             </a:r>
           </a:p>
           <a:p>
@@ -6284,7 +8672,7 @@
               </a:defRPr>
             </a:pPr>
             <a:r>
-              <a:t>• START: SDA goes 1→0 while SCL is 1.</a:t>
+              <a:t>      I2C_LEARNING_GUIDE.md — what I²C is, what kind of</a:t>
             </a:r>
           </a:p>
           <a:p>
@@ -6303,7 +8691,7 @@
               </a:defRPr>
             </a:pPr>
             <a:r>
-              <a:t>• STOP: SDA goes 0→1 while SCL is 1.</a:t>
+              <a:t>      protocol (s…</a:t>
             </a:r>
           </a:p>
           <a:p>
@@ -6322,7 +8710,7 @@
               </a:defRPr>
             </a:pPr>
             <a:r>
-              <a:t>• Address phase: 7-bit address + R/W bit (0=write,</a:t>
+              <a:t>• Read the protocols + UVM overview:</a:t>
             </a:r>
           </a:p>
           <a:p>
@@ -6341,7 +8729,7 @@
               </a:defRPr>
             </a:pPr>
             <a:r>
-              <a:t>      1=read) sent MSB first.</a:t>
+              <a:t>      LEARNING_GUIDE_PROTOCOLS_AND_UVM.md — Part B § 4.</a:t>
             </a:r>
           </a:p>
           <a:p>
@@ -6360,45 +8748,7 @@
               </a:defRPr>
             </a:pPr>
             <a:r>
-              <a:t>• Data phase: 8-bit data bytes sent MSB first.</a:t>
-            </a:r>
-          </a:p>
-          <a:p>
-            <a:pPr>
-              <a:lnSpc>
-                <a:spcPts val="2200"/>
-              </a:lnSpc>
-              <a:spcAft>
-                <a:spcPts val="1000"/>
-              </a:spcAft>
-              <a:defRPr sz="2000" b="0">
-                <a:solidFill>
-                  <a:srgbClr val="333333"/>
-                </a:solidFill>
-                <a:latin typeface="Calibri"/>
-              </a:defRPr>
-            </a:pPr>
-            <a:r>
-              <a:t>• ACK/NACK (concept): receiver pulls SDA low for ACK</a:t>
-            </a:r>
-          </a:p>
-          <a:p>
-            <a:pPr>
-              <a:lnSpc>
-                <a:spcPts val="2200"/>
-              </a:lnSpc>
-              <a:spcAft>
-                <a:spcPts val="1000"/>
-              </a:spcAft>
-              <a:defRPr sz="2000" b="0">
-                <a:solidFill>
-                  <a:srgbClr val="333333"/>
-                </a:solidFill>
-                <a:latin typeface="Calibri"/>
-              </a:defRPr>
-            </a:pPr>
-            <a:r>
-              <a:t>      on the 9th clock; high means NACK.</a:t>
+              <a:t>      When to Use Ba…</a:t>
             </a:r>
           </a:p>
         </p:txBody>
@@ -6468,8 +8818,8 @@
         </p:nvSpPr>
         <p:spPr>
           <a:xfrm>
-            <a:off x="548640" y="411480"/>
-            <a:ext cx="11064240" cy="777240"/>
+            <a:off x="548640" y="2743200"/>
+            <a:ext cx="11064240" cy="1371600"/>
           </a:xfrm>
           <a:prstGeom prst="rect">
             <a:avLst/>
@@ -6482,11 +8832,11 @@
           </a:bodyPr>
           <a:lstStyle/>
           <a:p>
-            <a:pPr>
-              <a:lnSpc>
-                <a:spcPts val="2200"/>
-              </a:lnSpc>
-              <a:defRPr sz="2800" b="1">
+            <a:pPr algn="ctr">
+              <a:lnSpc>
+                <a:spcPts val="2200"/>
+              </a:lnSpc>
+              <a:defRPr sz="3600" b="1">
                 <a:solidFill>
                   <a:srgbClr val="1A1A2E"/>
                 </a:solidFill>
@@ -6494,7 +8844,7 @@
               </a:defRPr>
             </a:pPr>
             <a:r>
-              <a:t>2. RTL Architecture (Baseline)</a:t>
+              <a:t>Design architecture</a:t>
             </a:r>
           </a:p>
         </p:txBody>
@@ -6502,162 +8852,6 @@
       <p:sp>
         <p:nvSpPr>
           <p:cNvPr id="3" name="TextBox 2"/>
-          <p:cNvSpPr txBox="1"/>
-          <p:nvPr/>
-        </p:nvSpPr>
-        <p:spPr>
-          <a:xfrm>
-            <a:off x="548640" y="1234440"/>
-            <a:ext cx="11064240" cy="4937760"/>
-          </a:xfrm>
-          <a:prstGeom prst="rect">
-            <a:avLst/>
-          </a:prstGeom>
-          <a:noFill/>
-        </p:spPr>
-        <p:txBody>
-          <a:bodyPr wrap="square">
-            <a:noAutofit/>
-          </a:bodyPr>
-          <a:lstStyle/>
-          <a:p>
-            <a:pPr>
-              <a:lnSpc>
-                <a:spcPts val="2200"/>
-              </a:lnSpc>
-              <a:spcAft>
-                <a:spcPts val="1000"/>
-              </a:spcAft>
-              <a:defRPr sz="2000" b="0">
-                <a:solidFill>
-                  <a:srgbClr val="333333"/>
-                </a:solidFill>
-                <a:latin typeface="Calibri"/>
-              </a:defRPr>
-            </a:pPr>
-            <a:r>
-              <a:t>• clk_div: Divides `clk` to produce `clk_div_tick`</a:t>
-            </a:r>
-          </a:p>
-          <a:p>
-            <a:pPr>
-              <a:lnSpc>
-                <a:spcPts val="2200"/>
-              </a:lnSpc>
-              <a:spcAft>
-                <a:spcPts val="1000"/>
-              </a:spcAft>
-              <a:defRPr sz="2000" b="0">
-                <a:solidFill>
-                  <a:srgbClr val="333333"/>
-                </a:solidFill>
-                <a:latin typeface="Calibri"/>
-              </a:defRPr>
-            </a:pPr>
-            <a:r>
-              <a:t>      used to toggle/advance SCL timing.</a:t>
-            </a:r>
-          </a:p>
-          <a:p>
-            <a:pPr>
-              <a:lnSpc>
-                <a:spcPts val="2200"/>
-              </a:lnSpc>
-              <a:spcAft>
-                <a:spcPts val="1000"/>
-              </a:spcAft>
-              <a:defRPr sz="2000" b="0">
-                <a:solidFill>
-                  <a:srgbClr val="333333"/>
-                </a:solidFill>
-                <a:latin typeface="Calibri"/>
-              </a:defRPr>
-            </a:pPr>
-            <a:r>
-              <a:t>• i2c_master: State machine that generates:</a:t>
-            </a:r>
-          </a:p>
-          <a:p>
-            <a:pPr>
-              <a:lnSpc>
-                <a:spcPts val="2200"/>
-              </a:lnSpc>
-              <a:spcAft>
-                <a:spcPts val="1000"/>
-              </a:spcAft>
-              <a:defRPr sz="2000" b="0">
-                <a:solidFill>
-                  <a:srgbClr val="333333"/>
-                </a:solidFill>
-                <a:latin typeface="Calibri"/>
-              </a:defRPr>
-            </a:pPr>
-            <a:r>
-              <a:t>• START condition</a:t>
-            </a:r>
-          </a:p>
-          <a:p>
-            <a:pPr>
-              <a:lnSpc>
-                <a:spcPts val="2200"/>
-              </a:lnSpc>
-              <a:spcAft>
-                <a:spcPts val="1000"/>
-              </a:spcAft>
-              <a:defRPr sz="2000" b="0">
-                <a:solidFill>
-                  <a:srgbClr val="333333"/>
-                </a:solidFill>
-                <a:latin typeface="Calibri"/>
-              </a:defRPr>
-            </a:pPr>
-            <a:r>
-              <a:t>• address+W bits</a:t>
-            </a:r>
-          </a:p>
-          <a:p>
-            <a:pPr>
-              <a:lnSpc>
-                <a:spcPts val="2200"/>
-              </a:lnSpc>
-              <a:spcAft>
-                <a:spcPts val="1000"/>
-              </a:spcAft>
-              <a:defRPr sz="2000" b="0">
-                <a:solidFill>
-                  <a:srgbClr val="333333"/>
-                </a:solidFill>
-                <a:latin typeface="Calibri"/>
-              </a:defRPr>
-            </a:pPr>
-            <a:r>
-              <a:t>• one data byte</a:t>
-            </a:r>
-          </a:p>
-          <a:p>
-            <a:pPr>
-              <a:lnSpc>
-                <a:spcPts val="2200"/>
-              </a:lnSpc>
-              <a:spcAft>
-                <a:spcPts val="1000"/>
-              </a:spcAft>
-              <a:defRPr sz="2000" b="0">
-                <a:solidFill>
-                  <a:srgbClr val="333333"/>
-                </a:solidFill>
-                <a:latin typeface="Calibri"/>
-              </a:defRPr>
-            </a:pPr>
-            <a:r>
-              <a:t>• STOP condition</a:t>
-            </a:r>
-          </a:p>
-        </p:txBody>
-      </p:sp>
-      <p:sp>
-        <p:nvSpPr>
-          <p:cNvPr id="4" name="TextBox 3"/>
           <p:cNvSpPr txBox="1"/>
           <p:nvPr/>
         </p:nvSpPr>
@@ -6746,21 +8940,45 @@
               </a:defRPr>
             </a:pPr>
             <a:r>
-              <a:t>3. Basic Testbench</a:t>
-            </a:r>
-          </a:p>
-        </p:txBody>
-      </p:sp>
-      <p:sp>
-        <p:nvSpPr>
-          <p:cNvPr id="3" name="TextBox 2"/>
+              <a:t>RTL / block architecture</a:t>
+            </a:r>
+          </a:p>
+        </p:txBody>
+      </p:sp>
+      <p:pic>
+        <p:nvPicPr>
+          <p:cNvPr id="3" name="Picture 2" descr="rtl_architecture.png"/>
+          <p:cNvPicPr>
+            <a:picLocks noChangeAspect="1"/>
+          </p:cNvPicPr>
+          <p:nvPr/>
+        </p:nvPicPr>
+        <p:blipFill>
+          <a:blip r:embed="rId2"/>
+          <a:stretch>
+            <a:fillRect/>
+          </a:stretch>
+        </p:blipFill>
+        <p:spPr>
+          <a:xfrm>
+            <a:off x="548640" y="1143000"/>
+            <a:ext cx="8128000" cy="4572000"/>
+          </a:xfrm>
+          <a:prstGeom prst="rect">
+            <a:avLst/>
+          </a:prstGeom>
+        </p:spPr>
+      </p:pic>
+      <p:sp>
+        <p:nvSpPr>
+          <p:cNvPr id="4" name="TextBox 3"/>
           <p:cNvSpPr txBox="1"/>
           <p:nvPr/>
         </p:nvSpPr>
         <p:spPr>
           <a:xfrm>
-            <a:off x="548640" y="1234440"/>
-            <a:ext cx="11064240" cy="4937760"/>
+            <a:off x="548640" y="5897880"/>
+            <a:ext cx="11064240" cy="411480"/>
           </a:xfrm>
           <a:prstGeom prst="rect">
             <a:avLst/>
@@ -6777,10 +8995,7 @@
               <a:lnSpc>
                 <a:spcPts val="2200"/>
               </a:lnSpc>
-              <a:spcAft>
-                <a:spcPts val="1000"/>
-              </a:spcAft>
-              <a:defRPr sz="2000" b="0">
+              <a:defRPr sz="1200" b="0">
                 <a:solidFill>
                   <a:srgbClr val="333333"/>
                 </a:solidFill>
@@ -6788,109 +9003,14 @@
               </a:defRPr>
             </a:pPr>
             <a:r>
-              <a:t>• Stimulus: Pulses `start`, sets `addr` and `data_in`,</a:t>
-            </a:r>
-          </a:p>
-          <a:p>
-            <a:pPr>
-              <a:lnSpc>
-                <a:spcPts val="2200"/>
-              </a:lnSpc>
-              <a:spcAft>
-                <a:spcPts val="1000"/>
-              </a:spcAft>
-              <a:defRPr sz="2000" b="0">
-                <a:solidFill>
-                  <a:srgbClr val="333333"/>
-                </a:solidFill>
-                <a:latin typeface="Calibri"/>
-              </a:defRPr>
-            </a:pPr>
-            <a:r>
-              <a:t>      waits for `done`.</a:t>
-            </a:r>
-          </a:p>
-          <a:p>
-            <a:pPr>
-              <a:lnSpc>
-                <a:spcPts val="2200"/>
-              </a:lnSpc>
-              <a:spcAft>
-                <a:spcPts val="1000"/>
-              </a:spcAft>
-              <a:defRPr sz="2000" b="0">
-                <a:solidFill>
-                  <a:srgbClr val="333333"/>
-                </a:solidFill>
-                <a:latin typeface="Calibri"/>
-              </a:defRPr>
-            </a:pPr>
-            <a:r>
-              <a:t>• Monitor/self-check: Detects START, then samples SDA</a:t>
-            </a:r>
-          </a:p>
-          <a:p>
-            <a:pPr>
-              <a:lnSpc>
-                <a:spcPts val="2200"/>
-              </a:lnSpc>
-              <a:spcAft>
-                <a:spcPts val="1000"/>
-              </a:spcAft>
-              <a:defRPr sz="2000" b="0">
-                <a:solidFill>
-                  <a:srgbClr val="333333"/>
-                </a:solidFill>
-                <a:latin typeface="Calibri"/>
-              </a:defRPr>
-            </a:pPr>
-            <a:r>
-              <a:t>      on each rising edge of SCL to reconstruct:</a:t>
-            </a:r>
-          </a:p>
-          <a:p>
-            <a:pPr>
-              <a:lnSpc>
-                <a:spcPts val="2200"/>
-              </a:lnSpc>
-              <a:spcAft>
-                <a:spcPts val="1000"/>
-              </a:spcAft>
-              <a:defRPr sz="2000" b="0">
-                <a:solidFill>
-                  <a:srgbClr val="333333"/>
-                </a:solidFill>
-                <a:latin typeface="Calibri"/>
-              </a:defRPr>
-            </a:pPr>
-            <a:r>
-              <a:t>• 8 bits of address+W</a:t>
-            </a:r>
-          </a:p>
-          <a:p>
-            <a:pPr>
-              <a:lnSpc>
-                <a:spcPts val="2200"/>
-              </a:lnSpc>
-              <a:spcAft>
-                <a:spcPts val="1000"/>
-              </a:spcAft>
-              <a:defRPr sz="2000" b="0">
-                <a:solidFill>
-                  <a:srgbClr val="333333"/>
-                </a:solidFill>
-                <a:latin typeface="Calibri"/>
-              </a:defRPr>
-            </a:pPr>
-            <a:r>
-              <a:t>• 8 bits of data</a:t>
-            </a:r>
-          </a:p>
-        </p:txBody>
-      </p:sp>
-      <p:sp>
-        <p:nvSpPr>
-          <p:cNvPr id="4" name="TextBox 3"/>
+              <a:t>Module 7: DUT / block hierarchy (see module7/examples/).</a:t>
+            </a:r>
+          </a:p>
+        </p:txBody>
+      </p:sp>
+      <p:sp>
+        <p:nvSpPr>
+          <p:cNvPr id="5" name="TextBox 4"/>
           <p:cNvSpPr txBox="1"/>
           <p:nvPr/>
         </p:nvSpPr>
